--- a/slides/week05/ch06_raptor.pptx
+++ b/slides/week05/ch06_raptor.pptx
@@ -943,7 +943,7 @@
           <a:lstStyle/>
           <a:p>
             <a:r>
-              <a:t>HW2가 6주차 마감이다. 직접 구현한 RAPTOR를 참조 결과와 대조하고 차이를 설명하는 과제이므로, 오늘 구현을 각자 완성해 두어야 한다.</a:t>
+              <a:t>HW2 명세는 assignments/hw2.md에 있고 오늘 배포한다. 마감은 다음 주 화요일 10-06이다. 직접 구현한 RAPTOR를 참조 결과와 대조하고 차이를 설명하는 과제이므로, 오늘 구현을 각자 완성해 두어야 한다.</a:t>
             </a:r>
           </a:p>
         </p:txBody>

--- a/slides/week05/ch06_raptor.pptx
+++ b/slides/week05/ch06_raptor.pptx
@@ -28,6 +28,7 @@
     <p:sldId id="276" r:id="rId27"/>
     <p:sldId id="277" r:id="rId28"/>
     <p:sldId id="278" r:id="rId29"/>
+    <p:sldId id="279" r:id="rId30"/>
   </p:sldIdLst>
   <p:notesMasterIdLst>
     <p:notesMasterId r:id="rId15"/>
@@ -593,7 +594,7 @@
           <a:lstStyle/>
           <a:p>
             <a:r>
-              <a:t>새로운 부분은 2단계다. 패턴을 한 번 순회하면서 탑승 상태를 유지하고 더 이른 운행이 있으면 교체한다.</a:t>
+              <a:t>상태 세 개만 이해하면 나머지는 반복문이다. 교재에서 raptor_core를 한 줄씩 함께 확인한다.</a:t>
             </a:r>
           </a:p>
         </p:txBody>
@@ -663,7 +664,7 @@
           <a:lstStyle/>
           <a:p>
             <a:r>
-              <a:t>라운드마다 이 정류장에 어떻게 도달했는지 기록해 두면 역방향으로 경로를 복원할 수 있다. 정리된 구현이 그렇게 되어 있다.</a:t>
+              <a:t>새로운 부분은 2단계다. 패턴을 한 번 순회하면서 탑승 상태를 유지하고 더 이른 운행이 있으면 교체한다.</a:t>
             </a:r>
           </a:p>
         </p:txBody>
@@ -733,7 +734,7 @@
           <a:lstStyle/>
           <a:p>
             <a:r>
-              <a:t>이동 시간보다 이동하지 않는 시간이 길다. 대중교통 개선이 배차간격과 접근성에 집중되는 이유이고, 기말 프로젝트 시나리오 선택의 근거가 된다.</a:t>
+              <a:t>라운드마다 이 정류장에 어떻게 도달했는지 기록해 두면 역방향으로 경로를 복원할 수 있다. 정리된 구현이 그렇게 되어 있다.</a:t>
             </a:r>
           </a:p>
         </p:txBody>
@@ -803,7 +804,7 @@
           <a:lstStyle/>
           <a:p>
             <a:r>
-              <a:t>늦게 출발했는데 더 일찍 도착하는 일은 있을 수 없다. 하나라도 나오면 구현이 틀린 것이다. 검증 코드는 tests/test_raptor.py에 있다.</a:t>
+              <a:t>이동 시간보다 이동하지 않는 시간이 길다. 대중교통 개선이 배차간격과 접근성에 집중되는 이유이고, 기말 프로젝트 시나리오 선택의 근거가 된다.</a:t>
             </a:r>
           </a:p>
         </p:txBody>
@@ -873,7 +874,7 @@
           <a:lstStyle/>
           <a:p>
             <a:r>
-              <a:t>하남시청에서 미사역까지 오전 8시는 23분이고 그중 차내가 6.6분이다. 이 수치가 7장 지표와 기말 프로젝트로 이어진다.</a:t>
+              <a:t>늦게 출발했는데 더 일찍 도착하는 일은 있을 수 없다. 하나라도 나오면 구현이 틀린 것이다. 검증 코드는 tests/test_raptor.py에 있다.</a:t>
             </a:r>
           </a:p>
         </p:txBody>
@@ -943,6 +944,76 @@
           <a:lstStyle/>
           <a:p>
             <a:r>
+              <a:t>하남시청에서 미사역까지 오전 8시는 23분이고 그중 차내가 6.6분이다. 이 수치가 7장 지표와 기말 프로젝트로 이어진다.</a:t>
+            </a:r>
+          </a:p>
+        </p:txBody>
+      </p:sp>
+      <p:sp>
+        <p:nvSpPr>
+          <p:cNvPr id="4" name="Slide Number Placeholder 3"/>
+          <p:cNvSpPr>
+            <a:spLocks noGrp="1"/>
+          </p:cNvSpPr>
+          <p:nvPr>
+            <p:ph type="sldNum" idx="5" sz="quarter"/>
+          </p:nvPr>
+        </p:nvSpPr>
+        <p:spPr/>
+      </p:sp>
+    </p:spTree>
+  </p:cSld>
+  <p:clrMapOvr>
+    <a:masterClrMapping/>
+  </p:clrMapOvr>
+</p:notes>
+</file>
+
+<file path=ppt/notesSlides/notesSlide16.xml><?xml version="1.0" encoding="utf-8"?>
+<p:notes xmlns:a="http://schemas.openxmlformats.org/drawingml/2006/main" xmlns:p="http://schemas.openxmlformats.org/presentationml/2006/main" xmlns:r="http://schemas.openxmlformats.org/officeDocument/2006/relationships">
+  <p:cSld>
+    <p:spTree>
+      <p:nvGrpSpPr>
+        <p:cNvPr id="1" name=""/>
+        <p:cNvGrpSpPr/>
+        <p:nvPr/>
+      </p:nvGrpSpPr>
+      <p:grpSpPr>
+        <a:xfrm>
+          <a:off x="0" y="0"/>
+          <a:ext cx="0" cy="0"/>
+          <a:chOff x="0" y="0"/>
+          <a:chExt cx="0" cy="0"/>
+        </a:xfrm>
+      </p:grpSpPr>
+      <p:sp>
+        <p:nvSpPr>
+          <p:cNvPr id="2" name="Slide Image Placeholder 1"/>
+          <p:cNvSpPr>
+            <a:spLocks noGrp="1"/>
+          </p:cNvSpPr>
+          <p:nvPr>
+            <p:ph type="sldImg" idx="2"/>
+          </p:nvPr>
+        </p:nvSpPr>
+        <p:spPr/>
+      </p:sp>
+      <p:sp>
+        <p:nvSpPr>
+          <p:cNvPr id="3" name="Notes Placeholder 2"/>
+          <p:cNvSpPr>
+            <a:spLocks noGrp="1"/>
+          </p:cNvSpPr>
+          <p:nvPr>
+            <p:ph type="body" idx="3" sz="quarter"/>
+          </p:nvPr>
+        </p:nvSpPr>
+        <p:spPr/>
+        <p:txBody>
+          <a:bodyPr/>
+          <a:lstStyle/>
+          <a:p>
+            <a:r>
               <a:t>HW2 명세는 assignments/hw2.md에 있고 오늘 배포한다. 마감은 다음 주 화요일 10-06이다. 직접 구현한 RAPTOR를 참조 결과와 대조하고 차이를 설명하는 과제이므로, 오늘 구현을 각자 완성해 두어야 한다.</a:t>
             </a:r>
           </a:p>
@@ -1153,7 +1224,7 @@
           <a:lstStyle/>
           <a:p>
             <a:r>
-              <a:t>억지로 그래프를 만들 수는 있지만 크기와 재구성 비용에서 실패한다.</a:t>
+              <a:t>슬라이드는 개요만 다룬다. 세부 내용과 코드는 교재 원고와 실습 노트북에서 확인한다. 교재 저장소는 비공개이므로 초대받은 계정으로 로그인한 상태여야 주소가 열린다.</a:t>
             </a:r>
           </a:p>
         </p:txBody>
@@ -1223,7 +1294,7 @@
           <a:lstStyle/>
           <a:p>
             <a:r>
-              <a:t>라운드마다 새로 도달한 정류장을 보관하고 그 정류장을 지나는 노선만 순회한다. 우선순위 큐도 정렬도 없이 순서대로 순회하기만 한다. 이 단순함이 RAPTOR가 빠른 이유다.</a:t>
+              <a:t>억지로 그래프를 만들 수는 있지만 크기와 재구성 비용에서 실패한다.</a:t>
             </a:r>
           </a:p>
         </p:txBody>
@@ -1293,7 +1364,7 @@
           <a:lstStyle/>
           <a:p>
             <a:r>
-              <a:t>노선당 패턴 수는 96개 노선이 1개, 61개가 2개(상하행), 나머지 12개가 4개에서 22개다. 패턴이 22개인 노선은 지선이 여럿이거나 시간대별로 일부 구간을 생략하거나 회차 지점이 여러 개다.</a:t>
+              <a:t>라운드마다 새로 도달한 정류장을 보관하고 그 정류장을 지나는 노선만 순회한다. 우선순위 큐도 정렬도 없이 순서대로 순회하기만 한다. 이 단순함이 RAPTOR가 빠른 이유다.</a:t>
             </a:r>
           </a:p>
         </p:txBody>
@@ -1363,7 +1434,7 @@
           <a:lstStyle/>
           <a:p>
             <a:r>
-              <a:t>가장 많은 패턴이 지나는 정류장이 어디인지 교재에서 함께 확인한다.</a:t>
+              <a:t>노선당 패턴 수는 96개 노선이 1개, 61개가 2개(상하행), 나머지 12개가 4개에서 22개다. 패턴이 22개인 노선은 지선이 여럿이거나 시간대별로 일부 구간을 생략하거나 회차 지점이 여러 개다.</a:t>
             </a:r>
           </a:p>
         </p:txBody>
@@ -1433,7 +1504,7 @@
           <a:lstStyle/>
           <a:p>
             <a:r>
-              <a:t>직선거리 기반 값은 낙관적이다. 한강을 사이에 둔 두 정류장이 직선 400 m면 환승이 생성되지만 실제로는 다리를 건너야 한다. 실제 엔진은 보행 네트워크에서 다익스트라로 이런 쌍을 제외한다.</a:t>
+              <a:t>가장 많은 패턴이 지나는 정류장이 어디인지 교재에서 함께 확인한다.</a:t>
             </a:r>
           </a:p>
         </p:txBody>
@@ -1503,7 +1574,7 @@
           <a:lstStyle/>
           <a:p>
             <a:r>
-              <a:t>상태 세 개만 이해하면 나머지는 반복문이다. 교재에서 raptor_core를 한 줄씩 함께 확인한다.</a:t>
+              <a:t>직선거리 기반 값은 낙관적이다. 한강을 사이에 둔 두 정류장이 직선 400 m면 환승이 생성되지만 실제로는 다리를 건너야 한다. 실제 엔진은 보행 네트워크에서 다익스트라로 이런 쌍을 제외한다.</a:t>
             </a:r>
           </a:p>
         </p:txBody>
@@ -5138,6 +5209,136 @@
       <p:grpSpPr/>
       <p:sp>
         <p:nvSpPr>
+          <p:cNvPr id="2" name="Text Placeholder 1"/>
+          <p:cNvSpPr>
+            <a:spLocks noGrp="1"/>
+          </p:cNvSpPr>
+          <p:nvPr>
+            <p:ph type="body" idx="100"/>
+          </p:nvPr>
+        </p:nvSpPr>
+        <p:spPr/>
+        <p:txBody>
+          <a:bodyPr/>
+          <a:lstStyle/>
+          <a:p>
+            <a:r>
+              <a:t>03</a:t>
+            </a:r>
+          </a:p>
+        </p:txBody>
+      </p:sp>
+      <p:sp>
+        <p:nvSpPr>
+          <p:cNvPr id="3" name="Title 2"/>
+          <p:cNvSpPr>
+            <a:spLocks noGrp="1"/>
+          </p:cNvSpPr>
+          <p:nvPr>
+            <p:ph type="title" idx="101"/>
+          </p:nvPr>
+        </p:nvSpPr>
+        <p:spPr/>
+        <p:txBody>
+          <a:bodyPr/>
+          <a:lstStyle/>
+          <a:p>
+            <a:r>
+              <a:t>교재 6.2–6.4 세 가지 준비</a:t>
+            </a:r>
+          </a:p>
+        </p:txBody>
+      </p:sp>
+      <p:sp>
+        <p:nvSpPr>
+          <p:cNvPr id="4" name="Text Placeholder 3"/>
+          <p:cNvSpPr>
+            <a:spLocks noGrp="1"/>
+          </p:cNvSpPr>
+          <p:nvPr>
+            <p:ph type="body" idx="102"/>
+          </p:nvPr>
+        </p:nvSpPr>
+        <p:spPr/>
+        <p:txBody>
+          <a:bodyPr/>
+          <a:lstStyle/>
+          <a:p>
+            <a:pPr>
+              <a:spcAft>
+                <a:spcPts val="1000"/>
+              </a:spcAft>
+            </a:pPr>
+            <a:r>
+              <a:rPr>
+                <a:solidFill>
+                  <a:srgbClr val="AFAFAF"/>
+                </a:solidFill>
+              </a:rPr>
+              <a:t>3.1  </a:t>
+            </a:r>
+            <a:r>
+              <a:t>노선이 아니라 패턴</a:t>
+            </a:r>
+          </a:p>
+          <a:p>
+            <a:pPr>
+              <a:spcAft>
+                <a:spcPts val="1000"/>
+              </a:spcAft>
+            </a:pPr>
+            <a:r>
+              <a:rPr>
+                <a:solidFill>
+                  <a:srgbClr val="AFAFAF"/>
+                </a:solidFill>
+              </a:rPr>
+              <a:t>3.2  </a:t>
+            </a:r>
+            <a:r>
+              <a:t>정류장에서 패턴으로의 역색인</a:t>
+            </a:r>
+          </a:p>
+          <a:p>
+            <a:pPr>
+              <a:spcAft>
+                <a:spcPts val="1000"/>
+              </a:spcAft>
+            </a:pPr>
+            <a:r>
+              <a:rPr>
+                <a:solidFill>
+                  <a:srgbClr val="AFAFAF"/>
+                </a:solidFill>
+              </a:rPr>
+              <a:t>3.3  </a:t>
+            </a:r>
+            <a:r>
+              <a:t>도보 환승 생성</a:t>
+            </a:r>
+          </a:p>
+        </p:txBody>
+      </p:sp>
+    </p:spTree>
+  </p:cSld>
+  <p:clrMapOvr>
+    <a:masterClrMapping/>
+  </p:clrMapOvr>
+</p:sld>
+</file>
+
+<file path=ppt/slides/slide11.xml><?xml version="1.0" encoding="utf-8"?>
+<p:sld xmlns:a="http://schemas.openxmlformats.org/drawingml/2006/main" xmlns:p="http://schemas.openxmlformats.org/presentationml/2006/main" xmlns:r="http://schemas.openxmlformats.org/officeDocument/2006/relationships">
+  <p:cSld>
+    <p:spTree>
+      <p:nvGrpSpPr>
+        <p:cNvPr id="1" name=""/>
+        <p:cNvGrpSpPr/>
+        <p:nvPr/>
+      </p:nvGrpSpPr>
+      <p:grpSpPr/>
+      <p:sp>
+        <p:nvSpPr>
           <p:cNvPr id="2" name="Title 1"/>
           <p:cNvSpPr>
             <a:spLocks noGrp="1"/>
@@ -5228,7 +5429,7 @@
           <a:lstStyle/>
           <a:p>
             <a:r>
-              <a:t>표 1. 하남 GTFS의 노선, 운행, 패턴 규모</a:t>
+              <a:t>표 2. 하남 GTFS의 노선, 운행, 패턴 규모</a:t>
             </a:r>
           </a:p>
         </p:txBody>
@@ -5750,154 +5951,6 @@
 </p:sld>
 </file>
 
-<file path=ppt/slides/slide11.xml><?xml version="1.0" encoding="utf-8"?>
-<p:sld xmlns:a="http://schemas.openxmlformats.org/drawingml/2006/main" xmlns:p="http://schemas.openxmlformats.org/presentationml/2006/main" xmlns:r="http://schemas.openxmlformats.org/officeDocument/2006/relationships">
-  <p:cSld>
-    <p:spTree>
-      <p:nvGrpSpPr>
-        <p:cNvPr id="1" name=""/>
-        <p:cNvGrpSpPr/>
-        <p:nvPr/>
-      </p:nvGrpSpPr>
-      <p:grpSpPr/>
-      <p:sp>
-        <p:nvSpPr>
-          <p:cNvPr id="2" name="Title 1"/>
-          <p:cNvSpPr>
-            <a:spLocks noGrp="1"/>
-          </p:cNvSpPr>
-          <p:nvPr>
-            <p:ph type="title" idx="100"/>
-          </p:nvPr>
-        </p:nvSpPr>
-        <p:spPr/>
-        <p:txBody>
-          <a:bodyPr/>
-          <a:lstStyle/>
-          <a:p>
-            <a:r>
-              <a:t>3.2 정류장에서 패턴으로의 역색인</a:t>
-            </a:r>
-          </a:p>
-        </p:txBody>
-      </p:sp>
-      <p:sp>
-        <p:nvSpPr>
-          <p:cNvPr id="3" name="Text Placeholder 2"/>
-          <p:cNvSpPr>
-            <a:spLocks noGrp="1"/>
-          </p:cNvSpPr>
-          <p:nvPr>
-            <p:ph type="body" idx="101"/>
-          </p:nvPr>
-        </p:nvSpPr>
-        <p:spPr/>
-        <p:txBody>
-          <a:bodyPr/>
-          <a:lstStyle/>
-          <a:p>
-            <a:r>
-              <a:t>3. 교재 6.2–6.4 세 가지 준비</a:t>
-            </a:r>
-          </a:p>
-        </p:txBody>
-      </p:sp>
-      <p:sp>
-        <p:nvSpPr>
-          <p:cNvPr id="4" name="Text Placeholder 3"/>
-          <p:cNvSpPr>
-            <a:spLocks noGrp="1"/>
-          </p:cNvSpPr>
-          <p:nvPr>
-            <p:ph type="body" idx="102"/>
-          </p:nvPr>
-        </p:nvSpPr>
-        <p:spPr/>
-        <p:txBody>
-          <a:bodyPr/>
-          <a:lstStyle/>
-          <a:p>
-            <a:pPr/>
-            <a:r>
-              <a:t>필요: 라운드마다 이 정류장을 지나는 패턴 조회</a:t>
-            </a:r>
-          </a:p>
-          <a:p>
-            <a:pPr/>
-            <a:r>
-              <a:t>매번 349개 패턴을 순회하면 느림 — 사전에 역방향 색인 구성</a:t>
-            </a:r>
-          </a:p>
-          <a:p>
-            <a:pPr/>
-            <a:r>
-              <a:t>저장 내용: 패턴 번호와 그 패턴에서의 정류장 위치</a:t>
-            </a:r>
-          </a:p>
-          <a:p>
-            <a:pPr/>
-            <a:r>
-              <a:t>위치가 필요한 이유: 해당 지점부터 순회해야 함</a:t>
-            </a:r>
-          </a:p>
-        </p:txBody>
-      </p:sp>
-      <p:sp>
-        <p:nvSpPr>
-          <p:cNvPr id="25" name="Slide Number Placeholder 0"/>
-          <p:cNvSpPr>
-            <a:spLocks noGrp="1"/>
-          </p:cNvSpPr>
-          <p:nvPr>
-            <p:ph type="sldNum" sz="quarter" idx="4294967295"/>
-          </p:nvPr>
-        </p:nvSpPr>
-        <p:spPr>
-          <a:xfrm>
-            <a:off x="10591495" y="6355080"/>
-            <a:ext cx="914400" cy="274320"/>
-          </a:xfrm>
-          <a:prstGeom prst="rect">
-            <a:avLst/>
-          </a:prstGeom>
-          <a:extLst>
-            <a:ext uri="{C572A759-6A51-4108-AA02-DFA0A04FC94B}">
-              <ma14:wrappingTextBoxFlag xmlns:ma14="http://schemas.microsoft.com/office/mac/drawingml/2011/main" val="0"/>
-            </a:ext>
-          </a:extLst>
-        </p:spPr>
-        <p:txBody>
-          <a:bodyPr/>
-          <a:lstStyle>
-            <a:lvl1pPr>
-              <a:defRPr sz="1000">
-                <a:solidFill>
-                  <a:srgbClr val="AFAFAF"/>
-                </a:solidFill>
-                <a:latin typeface="Pretendard Medium"/>
-                <a:ea typeface="Pretendard Medium"/>
-                <a:cs typeface="Pretendard Medium"/>
-              </a:defRPr>
-            </a:lvl1pPr>
-          </a:lstStyle>
-          <a:p>
-            <a:pPr algn="r"/>
-            <a:fld id="{F7021451-1387-4CA6-816F-3879F97B5CBC}" type="slidenum">
-              <a:rPr b="0" lang="en-US"/>
-              <a:t>1004</a:t>
-            </a:fld>
-            <a:endParaRPr lang="en-US"/>
-          </a:p>
-        </p:txBody>
-      </p:sp>
-    </p:spTree>
-  </p:cSld>
-  <p:clrMapOvr>
-    <a:masterClrMapping/>
-  </p:clrMapOvr>
-</p:sld>
-</file>
-
 <file path=ppt/slides/slide12.xml><?xml version="1.0" encoding="utf-8"?>
 <p:sld xmlns:a="http://schemas.openxmlformats.org/drawingml/2006/main" xmlns:p="http://schemas.openxmlformats.org/presentationml/2006/main" xmlns:r="http://schemas.openxmlformats.org/officeDocument/2006/relationships">
   <p:cSld>
@@ -5924,7 +5977,7 @@
           <a:lstStyle/>
           <a:p>
             <a:r>
-              <a:t>3.3 도보 환승 생성</a:t>
+              <a:t>3.2 정류장에서 패턴으로의 역색인</a:t>
             </a:r>
           </a:p>
         </p:txBody>
@@ -5967,37 +6020,25 @@
           <a:p>
             <a:pPr/>
             <a:r>
-              <a:t>한국 GTFS에는 transfers 파일이 대부분 없음 — 직접 생성</a:t>
+              <a:t>필요: 라운드마다 이 정류장을 지나는 패턴 조회</a:t>
             </a:r>
           </a:p>
           <a:p>
             <a:pPr/>
             <a:r>
-              <a:t>생성 규칙: 500 m 이내 정류장 쌍</a:t>
-            </a:r>
-          </a:p>
-          <a:p>
-            <a:pPr lvl="1"/>
-            <a:r>
-              <a:t>직선거리에 1.35를 곱해 우회 반영</a:t>
-            </a:r>
-          </a:p>
-          <a:p>
-            <a:pPr lvl="1"/>
-            <a:r>
-              <a:t>초속 1.2 m로 나눠 도보 시간 산출</a:t>
+              <a:t>매번 349개 패턴을 순회하면 느림 — 사전에 역방향 색인 구성</a:t>
             </a:r>
           </a:p>
           <a:p>
             <a:pPr/>
             <a:r>
-              <a:t>결과: 도보 환승 28,818쌍 · 정류장당 평균 7개</a:t>
+              <a:t>저장 내용: 패턴 번호와 그 패턴에서의 정류장 위치</a:t>
             </a:r>
           </a:p>
           <a:p>
             <a:pPr/>
             <a:r>
-              <a:t>평균이 큰 이유: 버스 정류장이 도로 양쪽에 하나씩 존재</a:t>
+              <a:t>위치가 필요한 이유: 해당 지점부터 순회해야 함</a:t>
             </a:r>
           </a:p>
         </p:txBody>
@@ -6070,12 +6111,12 @@
       <p:grpSpPr/>
       <p:sp>
         <p:nvSpPr>
-          <p:cNvPr id="2" name="Text Placeholder 1"/>
-          <p:cNvSpPr>
-            <a:spLocks noGrp="1"/>
-          </p:cNvSpPr>
-          <p:nvPr>
-            <p:ph type="body" idx="100"/>
+          <p:cNvPr id="2" name="Title 1"/>
+          <p:cNvSpPr>
+            <a:spLocks noGrp="1"/>
+          </p:cNvSpPr>
+          <p:nvPr>
+            <p:ph type="title" idx="100"/>
           </p:nvPr>
         </p:nvSpPr>
         <p:spPr/>
@@ -6084,19 +6125,19 @@
           <a:lstStyle/>
           <a:p>
             <a:r>
-              <a:t>04</a:t>
-            </a:r>
-          </a:p>
-        </p:txBody>
-      </p:sp>
-      <p:sp>
-        <p:nvSpPr>
-          <p:cNvPr id="3" name="Title 2"/>
-          <p:cNvSpPr>
-            <a:spLocks noGrp="1"/>
-          </p:cNvSpPr>
-          <p:nvPr>
-            <p:ph type="title" idx="101"/>
+              <a:t>3.3 도보 환승 생성</a:t>
+            </a:r>
+          </a:p>
+        </p:txBody>
+      </p:sp>
+      <p:sp>
+        <p:nvSpPr>
+          <p:cNvPr id="3" name="Text Placeholder 2"/>
+          <p:cNvSpPr>
+            <a:spLocks noGrp="1"/>
+          </p:cNvSpPr>
+          <p:nvPr>
+            <p:ph type="body" idx="101"/>
           </p:nvPr>
         </p:nvSpPr>
         <p:spPr/>
@@ -6105,7 +6146,7 @@
           <a:lstStyle/>
           <a:p>
             <a:r>
-              <a:t>교재 6.5 알고리즘</a:t>
+              <a:t>3. 교재 6.2–6.4 세 가지 준비</a:t>
             </a:r>
           </a:p>
         </p:txBody>
@@ -6125,40 +6166,88 @@
           <a:bodyPr/>
           <a:lstStyle/>
           <a:p>
-            <a:pPr>
-              <a:spcAft>
-                <a:spcPts val="1000"/>
-              </a:spcAft>
-            </a:pPr>
-            <a:r>
-              <a:rPr>
+            <a:pPr/>
+            <a:r>
+              <a:t>한국 GTFS에는 transfers 파일이 대부분 없음 — 직접 생성</a:t>
+            </a:r>
+          </a:p>
+          <a:p>
+            <a:pPr/>
+            <a:r>
+              <a:t>생성 규칙: 500 m 이내 정류장 쌍</a:t>
+            </a:r>
+          </a:p>
+          <a:p>
+            <a:pPr lvl="1"/>
+            <a:r>
+              <a:t>직선거리에 1.35를 곱해 우회 반영</a:t>
+            </a:r>
+          </a:p>
+          <a:p>
+            <a:pPr lvl="1"/>
+            <a:r>
+              <a:t>초속 1.2 m로 나눠 도보 시간 산출</a:t>
+            </a:r>
+          </a:p>
+          <a:p>
+            <a:pPr/>
+            <a:r>
+              <a:t>결과: 도보 환승 28,818쌍 · 정류장당 평균 7개</a:t>
+            </a:r>
+          </a:p>
+          <a:p>
+            <a:pPr/>
+            <a:r>
+              <a:t>평균이 큰 이유: 버스 정류장이 도로 양쪽에 하나씩 존재</a:t>
+            </a:r>
+          </a:p>
+        </p:txBody>
+      </p:sp>
+      <p:sp>
+        <p:nvSpPr>
+          <p:cNvPr id="25" name="Slide Number Placeholder 0"/>
+          <p:cNvSpPr>
+            <a:spLocks noGrp="1"/>
+          </p:cNvSpPr>
+          <p:nvPr>
+            <p:ph type="sldNum" sz="quarter" idx="4294967295"/>
+          </p:nvPr>
+        </p:nvSpPr>
+        <p:spPr>
+          <a:xfrm>
+            <a:off x="10591495" y="6355080"/>
+            <a:ext cx="914400" cy="274320"/>
+          </a:xfrm>
+          <a:prstGeom prst="rect">
+            <a:avLst/>
+          </a:prstGeom>
+          <a:extLst>
+            <a:ext uri="{C572A759-6A51-4108-AA02-DFA0A04FC94B}">
+              <ma14:wrappingTextBoxFlag xmlns:ma14="http://schemas.microsoft.com/office/mac/drawingml/2011/main" val="0"/>
+            </a:ext>
+          </a:extLst>
+        </p:spPr>
+        <p:txBody>
+          <a:bodyPr/>
+          <a:lstStyle>
+            <a:lvl1pPr>
+              <a:defRPr sz="1000">
                 <a:solidFill>
                   <a:srgbClr val="AFAFAF"/>
                 </a:solidFill>
-              </a:rPr>
-              <a:t>4.1  </a:t>
-            </a:r>
-            <a:r>
-              <a:t>상태와 라운드 0</a:t>
-            </a:r>
-          </a:p>
-          <a:p>
-            <a:pPr>
-              <a:spcAft>
-                <a:spcPts val="1000"/>
-              </a:spcAft>
-            </a:pPr>
-            <a:r>
-              <a:rPr>
-                <a:solidFill>
-                  <a:srgbClr val="AFAFAF"/>
-                </a:solidFill>
-              </a:rPr>
-              <a:t>4.2  </a:t>
-            </a:r>
-            <a:r>
-              <a:t>라운드 k의 네 단계</a:t>
-            </a:r>
+                <a:latin typeface="Pretendard Medium"/>
+                <a:ea typeface="Pretendard Medium"/>
+                <a:cs typeface="Pretendard Medium"/>
+              </a:defRPr>
+            </a:lvl1pPr>
+          </a:lstStyle>
+          <a:p>
+            <a:pPr algn="r"/>
+            <a:fld id="{F7021451-1387-4CA6-816F-3879F97B5CBC}" type="slidenum">
+              <a:rPr b="0" lang="en-US"/>
+              <a:t>1004</a:t>
+            </a:fld>
+            <a:endParaRPr lang="en-US"/>
           </a:p>
         </p:txBody>
       </p:sp>
@@ -6182,12 +6271,12 @@
       <p:grpSpPr/>
       <p:sp>
         <p:nvSpPr>
-          <p:cNvPr id="2" name="Title 1"/>
-          <p:cNvSpPr>
-            <a:spLocks noGrp="1"/>
-          </p:cNvSpPr>
-          <p:nvPr>
-            <p:ph type="title" idx="100"/>
+          <p:cNvPr id="2" name="Text Placeholder 1"/>
+          <p:cNvSpPr>
+            <a:spLocks noGrp="1"/>
+          </p:cNvSpPr>
+          <p:nvPr>
+            <p:ph type="body" idx="100"/>
           </p:nvPr>
         </p:nvSpPr>
         <p:spPr/>
@@ -6196,19 +6285,19 @@
           <a:lstStyle/>
           <a:p>
             <a:r>
-              <a:t>4.1 상태와 라운드 0</a:t>
-            </a:r>
-          </a:p>
-        </p:txBody>
-      </p:sp>
-      <p:sp>
-        <p:nvSpPr>
-          <p:cNvPr id="3" name="Text Placeholder 2"/>
-          <p:cNvSpPr>
-            <a:spLocks noGrp="1"/>
-          </p:cNvSpPr>
-          <p:nvPr>
-            <p:ph type="body" idx="101"/>
+              <a:t>04</a:t>
+            </a:r>
+          </a:p>
+        </p:txBody>
+      </p:sp>
+      <p:sp>
+        <p:nvSpPr>
+          <p:cNvPr id="3" name="Title 2"/>
+          <p:cNvSpPr>
+            <a:spLocks noGrp="1"/>
+          </p:cNvSpPr>
+          <p:nvPr>
+            <p:ph type="title" idx="101"/>
           </p:nvPr>
         </p:nvSpPr>
         <p:spPr/>
@@ -6217,7 +6306,7 @@
           <a:lstStyle/>
           <a:p>
             <a:r>
-              <a:t>4. 교재 6.5 알고리즘</a:t>
+              <a:t>교재 6.5 알고리즘</a:t>
             </a:r>
           </a:p>
         </p:txBody>
@@ -6237,76 +6326,40 @@
           <a:bodyPr/>
           <a:lstStyle/>
           <a:p>
-            <a:pPr/>
-            <a:r>
-              <a:t>best[정류장] — 현재까지 알아낸 가장 이른 도착 시각</a:t>
-            </a:r>
-          </a:p>
-          <a:p>
-            <a:pPr/>
-            <a:r>
-              <a:t>rounds[k][정류장] — k회 탑승으로 도달했을 때의 도착 시각</a:t>
-            </a:r>
-          </a:p>
-          <a:p>
-            <a:pPr/>
-            <a:r>
-              <a:t>marked — 직전 라운드에서 개선된 정류장 집합</a:t>
-            </a:r>
-          </a:p>
-          <a:p>
-            <a:pPr/>
-            <a:r>
-              <a:t>라운드 0: 출발지에서 도보로 닿는 정류장에 출발 시각 + 도보 시간 기록</a:t>
-            </a:r>
-          </a:p>
-        </p:txBody>
-      </p:sp>
-      <p:sp>
-        <p:nvSpPr>
-          <p:cNvPr id="25" name="Slide Number Placeholder 0"/>
-          <p:cNvSpPr>
-            <a:spLocks noGrp="1"/>
-          </p:cNvSpPr>
-          <p:nvPr>
-            <p:ph type="sldNum" sz="quarter" idx="4294967295"/>
-          </p:nvPr>
-        </p:nvSpPr>
-        <p:spPr>
-          <a:xfrm>
-            <a:off x="10591495" y="6355080"/>
-            <a:ext cx="914400" cy="274320"/>
-          </a:xfrm>
-          <a:prstGeom prst="rect">
-            <a:avLst/>
-          </a:prstGeom>
-          <a:extLst>
-            <a:ext uri="{C572A759-6A51-4108-AA02-DFA0A04FC94B}">
-              <ma14:wrappingTextBoxFlag xmlns:ma14="http://schemas.microsoft.com/office/mac/drawingml/2011/main" val="0"/>
-            </a:ext>
-          </a:extLst>
-        </p:spPr>
-        <p:txBody>
-          <a:bodyPr/>
-          <a:lstStyle>
-            <a:lvl1pPr>
-              <a:defRPr sz="1000">
+            <a:pPr>
+              <a:spcAft>
+                <a:spcPts val="1000"/>
+              </a:spcAft>
+            </a:pPr>
+            <a:r>
+              <a:rPr>
                 <a:solidFill>
                   <a:srgbClr val="AFAFAF"/>
                 </a:solidFill>
-                <a:latin typeface="Pretendard Medium"/>
-                <a:ea typeface="Pretendard Medium"/>
-                <a:cs typeface="Pretendard Medium"/>
-              </a:defRPr>
-            </a:lvl1pPr>
-          </a:lstStyle>
-          <a:p>
-            <a:pPr algn="r"/>
-            <a:fld id="{F7021451-1387-4CA6-816F-3879F97B5CBC}" type="slidenum">
-              <a:rPr b="0" lang="en-US"/>
-              <a:t>1004</a:t>
-            </a:fld>
-            <a:endParaRPr lang="en-US"/>
+              </a:rPr>
+              <a:t>4.1  </a:t>
+            </a:r>
+            <a:r>
+              <a:t>상태와 라운드 0</a:t>
+            </a:r>
+          </a:p>
+          <a:p>
+            <a:pPr>
+              <a:spcAft>
+                <a:spcPts val="1000"/>
+              </a:spcAft>
+            </a:pPr>
+            <a:r>
+              <a:rPr>
+                <a:solidFill>
+                  <a:srgbClr val="AFAFAF"/>
+                </a:solidFill>
+              </a:rPr>
+              <a:t>4.2  </a:t>
+            </a:r>
+            <a:r>
+              <a:t>라운드 k의 네 단계</a:t>
+            </a:r>
           </a:p>
         </p:txBody>
       </p:sp>
@@ -6344,7 +6397,7 @@
           <a:lstStyle/>
           <a:p>
             <a:r>
-              <a:t>4.2 라운드 k의 네 단계</a:t>
+              <a:t>4.1 상태와 라운드 0</a:t>
             </a:r>
           </a:p>
         </p:txBody>
@@ -6387,37 +6440,25 @@
           <a:p>
             <a:pPr/>
             <a:r>
-              <a:t>1단계: 표시된 정류장이 속한 패턴 수집 — 가장 앞 위치부터 시작</a:t>
+              <a:t>best[정류장] — 현재까지 알아낸 가장 이른 도착 시각</a:t>
             </a:r>
           </a:p>
           <a:p>
             <a:pPr/>
             <a:r>
-              <a:t>2단계: 각 패턴을 그 위치부터 끝까지 순회</a:t>
-            </a:r>
-          </a:p>
-          <a:p>
-            <a:pPr lvl="1"/>
-            <a:r>
-              <a:t>탑승 중이면 하차 시각 갱신 시도</a:t>
-            </a:r>
-          </a:p>
-          <a:p>
-            <a:pPr lvl="1"/>
-            <a:r>
-              <a:t>더 이른 운행이 있으면 그 운행으로 변경</a:t>
+              <a:t>rounds[k][정류장] — k회 탑승으로 도달했을 때의 도착 시각</a:t>
             </a:r>
           </a:p>
           <a:p>
             <a:pPr/>
             <a:r>
-              <a:t>3단계: 이번 라운드 도달 정류장에서 도보 환승 반영</a:t>
+              <a:t>marked — 직전 라운드에서 개선된 정류장 집합</a:t>
             </a:r>
           </a:p>
           <a:p>
             <a:pPr/>
             <a:r>
-              <a:t>4단계: 개선된 정류장이 없으면 종료</a:t>
+              <a:t>라운드 0: 출발지에서 도보로 닿는 정류장에 출발 시각 + 도보 시간 기록</a:t>
             </a:r>
           </a:p>
         </p:txBody>
@@ -6490,12 +6531,12 @@
       <p:grpSpPr/>
       <p:sp>
         <p:nvSpPr>
-          <p:cNvPr id="2" name="Text Placeholder 1"/>
-          <p:cNvSpPr>
-            <a:spLocks noGrp="1"/>
-          </p:cNvSpPr>
-          <p:nvPr>
-            <p:ph type="body" idx="100"/>
+          <p:cNvPr id="2" name="Title 1"/>
+          <p:cNvSpPr>
+            <a:spLocks noGrp="1"/>
+          </p:cNvSpPr>
+          <p:nvPr>
+            <p:ph type="title" idx="100"/>
           </p:nvPr>
         </p:nvSpPr>
         <p:spPr/>
@@ -6504,19 +6545,19 @@
           <a:lstStyle/>
           <a:p>
             <a:r>
-              <a:t>05</a:t>
-            </a:r>
-          </a:p>
-        </p:txBody>
-      </p:sp>
-      <p:sp>
-        <p:nvSpPr>
-          <p:cNvPr id="3" name="Title 2"/>
-          <p:cNvSpPr>
-            <a:spLocks noGrp="1"/>
-          </p:cNvSpPr>
-          <p:nvPr>
-            <p:ph type="title" idx="101"/>
+              <a:t>4.2 라운드 k의 네 단계</a:t>
+            </a:r>
+          </a:p>
+        </p:txBody>
+      </p:sp>
+      <p:sp>
+        <p:nvSpPr>
+          <p:cNvPr id="3" name="Text Placeholder 2"/>
+          <p:cNvSpPr>
+            <a:spLocks noGrp="1"/>
+          </p:cNvSpPr>
+          <p:nvPr>
+            <p:ph type="body" idx="101"/>
           </p:nvPr>
         </p:nvSpPr>
         <p:spPr/>
@@ -6525,7 +6566,7 @@
           <a:lstStyle/>
           <a:p>
             <a:r>
-              <a:t>교재 6.6 경로 복원과 지표</a:t>
+              <a:t>4. 교재 6.5 알고리즘</a:t>
             </a:r>
           </a:p>
         </p:txBody>
@@ -6545,40 +6586,88 @@
           <a:bodyPr/>
           <a:lstStyle/>
           <a:p>
-            <a:pPr>
-              <a:spcAft>
-                <a:spcPts val="1000"/>
-              </a:spcAft>
-            </a:pPr>
-            <a:r>
-              <a:rPr>
+            <a:pPr/>
+            <a:r>
+              <a:t>1단계: 표시된 정류장이 속한 패턴 수집 — 가장 앞 위치부터 시작</a:t>
+            </a:r>
+          </a:p>
+          <a:p>
+            <a:pPr/>
+            <a:r>
+              <a:t>2단계: 각 패턴을 그 위치부터 끝까지 순회</a:t>
+            </a:r>
+          </a:p>
+          <a:p>
+            <a:pPr lvl="1"/>
+            <a:r>
+              <a:t>탑승 중이면 하차 시각 갱신 시도</a:t>
+            </a:r>
+          </a:p>
+          <a:p>
+            <a:pPr lvl="1"/>
+            <a:r>
+              <a:t>더 이른 운행이 있으면 그 운행으로 변경</a:t>
+            </a:r>
+          </a:p>
+          <a:p>
+            <a:pPr/>
+            <a:r>
+              <a:t>3단계: 이번 라운드 도달 정류장에서 도보 환승 반영</a:t>
+            </a:r>
+          </a:p>
+          <a:p>
+            <a:pPr/>
+            <a:r>
+              <a:t>4단계: 개선된 정류장이 없으면 종료</a:t>
+            </a:r>
+          </a:p>
+        </p:txBody>
+      </p:sp>
+      <p:sp>
+        <p:nvSpPr>
+          <p:cNvPr id="25" name="Slide Number Placeholder 0"/>
+          <p:cNvSpPr>
+            <a:spLocks noGrp="1"/>
+          </p:cNvSpPr>
+          <p:nvPr>
+            <p:ph type="sldNum" sz="quarter" idx="4294967295"/>
+          </p:nvPr>
+        </p:nvSpPr>
+        <p:spPr>
+          <a:xfrm>
+            <a:off x="10591495" y="6355080"/>
+            <a:ext cx="914400" cy="274320"/>
+          </a:xfrm>
+          <a:prstGeom prst="rect">
+            <a:avLst/>
+          </a:prstGeom>
+          <a:extLst>
+            <a:ext uri="{C572A759-6A51-4108-AA02-DFA0A04FC94B}">
+              <ma14:wrappingTextBoxFlag xmlns:ma14="http://schemas.microsoft.com/office/mac/drawingml/2011/main" val="0"/>
+            </a:ext>
+          </a:extLst>
+        </p:spPr>
+        <p:txBody>
+          <a:bodyPr/>
+          <a:lstStyle>
+            <a:lvl1pPr>
+              <a:defRPr sz="1000">
                 <a:solidFill>
                   <a:srgbClr val="AFAFAF"/>
                 </a:solidFill>
-              </a:rPr>
-              <a:t>5.1  </a:t>
-            </a:r>
-            <a:r>
-              <a:t>실행 결과</a:t>
-            </a:r>
-          </a:p>
-          <a:p>
-            <a:pPr>
-              <a:spcAft>
-                <a:spcPts val="1000"/>
-              </a:spcAft>
-            </a:pPr>
-            <a:r>
-              <a:rPr>
-                <a:solidFill>
-                  <a:srgbClr val="AFAFAF"/>
-                </a:solidFill>
-              </a:rPr>
-              <a:t>5.2  </a:t>
-            </a:r>
-            <a:r>
-              <a:t>이동하지 않는 시간이 더 김</a:t>
-            </a:r>
+                <a:latin typeface="Pretendard Medium"/>
+                <a:ea typeface="Pretendard Medium"/>
+                <a:cs typeface="Pretendard Medium"/>
+              </a:defRPr>
+            </a:lvl1pPr>
+          </a:lstStyle>
+          <a:p>
+            <a:pPr algn="r"/>
+            <a:fld id="{F7021451-1387-4CA6-816F-3879F97B5CBC}" type="slidenum">
+              <a:rPr b="0" lang="en-US"/>
+              <a:t>1004</a:t>
+            </a:fld>
+            <a:endParaRPr lang="en-US"/>
           </a:p>
         </p:txBody>
       </p:sp>
@@ -6602,6 +6691,118 @@
       <p:grpSpPr/>
       <p:sp>
         <p:nvSpPr>
+          <p:cNvPr id="2" name="Text Placeholder 1"/>
+          <p:cNvSpPr>
+            <a:spLocks noGrp="1"/>
+          </p:cNvSpPr>
+          <p:nvPr>
+            <p:ph type="body" idx="100"/>
+          </p:nvPr>
+        </p:nvSpPr>
+        <p:spPr/>
+        <p:txBody>
+          <a:bodyPr/>
+          <a:lstStyle/>
+          <a:p>
+            <a:r>
+              <a:t>05</a:t>
+            </a:r>
+          </a:p>
+        </p:txBody>
+      </p:sp>
+      <p:sp>
+        <p:nvSpPr>
+          <p:cNvPr id="3" name="Title 2"/>
+          <p:cNvSpPr>
+            <a:spLocks noGrp="1"/>
+          </p:cNvSpPr>
+          <p:nvPr>
+            <p:ph type="title" idx="101"/>
+          </p:nvPr>
+        </p:nvSpPr>
+        <p:spPr/>
+        <p:txBody>
+          <a:bodyPr/>
+          <a:lstStyle/>
+          <a:p>
+            <a:r>
+              <a:t>교재 6.6 경로 복원과 지표</a:t>
+            </a:r>
+          </a:p>
+        </p:txBody>
+      </p:sp>
+      <p:sp>
+        <p:nvSpPr>
+          <p:cNvPr id="4" name="Text Placeholder 3"/>
+          <p:cNvSpPr>
+            <a:spLocks noGrp="1"/>
+          </p:cNvSpPr>
+          <p:nvPr>
+            <p:ph type="body" idx="102"/>
+          </p:nvPr>
+        </p:nvSpPr>
+        <p:spPr/>
+        <p:txBody>
+          <a:bodyPr/>
+          <a:lstStyle/>
+          <a:p>
+            <a:pPr>
+              <a:spcAft>
+                <a:spcPts val="1000"/>
+              </a:spcAft>
+            </a:pPr>
+            <a:r>
+              <a:rPr>
+                <a:solidFill>
+                  <a:srgbClr val="AFAFAF"/>
+                </a:solidFill>
+              </a:rPr>
+              <a:t>5.1  </a:t>
+            </a:r>
+            <a:r>
+              <a:t>실행 결과</a:t>
+            </a:r>
+          </a:p>
+          <a:p>
+            <a:pPr>
+              <a:spcAft>
+                <a:spcPts val="1000"/>
+              </a:spcAft>
+            </a:pPr>
+            <a:r>
+              <a:rPr>
+                <a:solidFill>
+                  <a:srgbClr val="AFAFAF"/>
+                </a:solidFill>
+              </a:rPr>
+              <a:t>5.2  </a:t>
+            </a:r>
+            <a:r>
+              <a:t>이동하지 않는 시간이 더 김</a:t>
+            </a:r>
+          </a:p>
+        </p:txBody>
+      </p:sp>
+    </p:spTree>
+  </p:cSld>
+  <p:clrMapOvr>
+    <a:masterClrMapping/>
+  </p:clrMapOvr>
+</p:sld>
+</file>
+
+<file path=ppt/slides/slide18.xml><?xml version="1.0" encoding="utf-8"?>
+<p:sld xmlns:a="http://schemas.openxmlformats.org/drawingml/2006/main" xmlns:p="http://schemas.openxmlformats.org/presentationml/2006/main" xmlns:r="http://schemas.openxmlformats.org/officeDocument/2006/relationships">
+  <p:cSld>
+    <p:spTree>
+      <p:nvGrpSpPr>
+        <p:cNvPr id="1" name=""/>
+        <p:cNvGrpSpPr/>
+        <p:nvPr/>
+      </p:nvGrpSpPr>
+      <p:grpSpPr/>
+      <p:sp>
+        <p:nvSpPr>
           <p:cNvPr id="2" name="Title 1"/>
           <p:cNvSpPr>
             <a:spLocks noGrp="1"/>
@@ -6692,7 +6893,7 @@
           <a:lstStyle/>
           <a:p>
             <a:r>
-              <a:t>표 2. 하남시청 출발 오전 8시 RAPTOR 실행 결과</a:t>
+              <a:t>표 3. 하남시청 출발 오전 8시 RAPTOR 실행 결과</a:t>
             </a:r>
           </a:p>
         </p:txBody>
@@ -7071,7 +7272,7 @@
 </p:sld>
 </file>
 
-<file path=ppt/slides/slide18.xml><?xml version="1.0" encoding="utf-8"?>
+<file path=ppt/slides/slide19.xml><?xml version="1.0" encoding="utf-8"?>
 <p:sld xmlns:a="http://schemas.openxmlformats.org/drawingml/2006/main" xmlns:p="http://schemas.openxmlformats.org/presentationml/2006/main" xmlns:r="http://schemas.openxmlformats.org/officeDocument/2006/relationships">
   <p:cSld>
     <p:spTree>
@@ -7173,7 +7374,7 @@
           <a:lstStyle/>
           <a:p>
             <a:r>
-              <a:t>표 3. 하남시청에서 미사역까지 오전 8시 출발 통행시간 내역</a:t>
+              <a:t>표 4. 하남시청에서 미사역까지 오전 8시 출발 통행시간 내역</a:t>
             </a:r>
           </a:p>
         </p:txBody>
@@ -7615,136 +7816,6 @@
               <a:t>1008</a:t>
             </a:fld>
             <a:endParaRPr lang="en-US"/>
-          </a:p>
-        </p:txBody>
-      </p:sp>
-    </p:spTree>
-  </p:cSld>
-  <p:clrMapOvr>
-    <a:masterClrMapping/>
-  </p:clrMapOvr>
-</p:sld>
-</file>
-
-<file path=ppt/slides/slide19.xml><?xml version="1.0" encoding="utf-8"?>
-<p:sld xmlns:a="http://schemas.openxmlformats.org/drawingml/2006/main" xmlns:p="http://schemas.openxmlformats.org/presentationml/2006/main" xmlns:r="http://schemas.openxmlformats.org/officeDocument/2006/relationships">
-  <p:cSld>
-    <p:spTree>
-      <p:nvGrpSpPr>
-        <p:cNvPr id="1" name=""/>
-        <p:cNvGrpSpPr/>
-        <p:nvPr/>
-      </p:nvGrpSpPr>
-      <p:grpSpPr/>
-      <p:sp>
-        <p:nvSpPr>
-          <p:cNvPr id="2" name="Text Placeholder 1"/>
-          <p:cNvSpPr>
-            <a:spLocks noGrp="1"/>
-          </p:cNvSpPr>
-          <p:nvPr>
-            <p:ph type="body" idx="100"/>
-          </p:nvPr>
-        </p:nvSpPr>
-        <p:spPr/>
-        <p:txBody>
-          <a:bodyPr/>
-          <a:lstStyle/>
-          <a:p>
-            <a:r>
-              <a:t>06</a:t>
-            </a:r>
-          </a:p>
-        </p:txBody>
-      </p:sp>
-      <p:sp>
-        <p:nvSpPr>
-          <p:cNvPr id="3" name="Title 2"/>
-          <p:cNvSpPr>
-            <a:spLocks noGrp="1"/>
-          </p:cNvSpPr>
-          <p:nvPr>
-            <p:ph type="title" idx="101"/>
-          </p:nvPr>
-        </p:nvSpPr>
-        <p:spPr/>
-        <p:txBody>
-          <a:bodyPr/>
-          <a:lstStyle/>
-          <a:p>
-            <a:r>
-              <a:t>교재 6.7 검증과 정리</a:t>
-            </a:r>
-          </a:p>
-        </p:txBody>
-      </p:sp>
-      <p:sp>
-        <p:nvSpPr>
-          <p:cNvPr id="4" name="Text Placeholder 3"/>
-          <p:cNvSpPr>
-            <a:spLocks noGrp="1"/>
-          </p:cNvSpPr>
-          <p:nvPr>
-            <p:ph type="body" idx="102"/>
-          </p:nvPr>
-        </p:nvSpPr>
-        <p:spPr/>
-        <p:txBody>
-          <a:bodyPr/>
-          <a:lstStyle/>
-          <a:p>
-            <a:pPr>
-              <a:spcAft>
-                <a:spcPts val="1000"/>
-              </a:spcAft>
-            </a:pPr>
-            <a:r>
-              <a:rPr>
-                <a:solidFill>
-                  <a:srgbClr val="AFAFAF"/>
-                </a:solidFill>
-              </a:rPr>
-              <a:t>6.1  </a:t>
-            </a:r>
-            <a:r>
-              <a:t>작은 시간표와 불변식</a:t>
-            </a:r>
-          </a:p>
-          <a:p>
-            <a:pPr>
-              <a:spcAft>
-                <a:spcPts val="1000"/>
-              </a:spcAft>
-            </a:pPr>
-            <a:r>
-              <a:rPr>
-                <a:solidFill>
-                  <a:srgbClr val="AFAFAF"/>
-                </a:solidFill>
-              </a:rPr>
-              <a:t>6.2  </a:t>
-            </a:r>
-            <a:r>
-              <a:t>오늘의 정리</a:t>
-            </a:r>
-          </a:p>
-          <a:p>
-            <a:pPr>
-              <a:spcAft>
-                <a:spcPts val="1000"/>
-              </a:spcAft>
-            </a:pPr>
-            <a:r>
-              <a:rPr>
-                <a:solidFill>
-                  <a:srgbClr val="AFAFAF"/>
-                </a:solidFill>
-              </a:rPr>
-              <a:t>6.3  </a:t>
-            </a:r>
-            <a:r>
-              <a:t>연습과 다음 장</a:t>
-            </a:r>
           </a:p>
         </p:txBody>
       </p:sp>
@@ -7916,7 +7987,7 @@
                           </a:solidFill>
                           <a:latin typeface="Pretendard Medium"/>
                         </a:rPr>
-                        <a:t>1.1 같은 구간, 다른 비용  ·  1.2 학습 목표</a:t>
+                        <a:t>1.1 같은 구간, 다른 비용  ·  1.2 학습 목표  ·  1.3 교재와 실습을 여는 곳</a:t>
                       </a:r>
                     </a:p>
                   </a:txBody>
@@ -8563,12 +8634,12 @@
       <p:grpSpPr/>
       <p:sp>
         <p:nvSpPr>
-          <p:cNvPr id="2" name="Title 1"/>
-          <p:cNvSpPr>
-            <a:spLocks noGrp="1"/>
-          </p:cNvSpPr>
-          <p:nvPr>
-            <p:ph type="title" idx="100"/>
+          <p:cNvPr id="2" name="Text Placeholder 1"/>
+          <p:cNvSpPr>
+            <a:spLocks noGrp="1"/>
+          </p:cNvSpPr>
+          <p:nvPr>
+            <p:ph type="body" idx="100"/>
           </p:nvPr>
         </p:nvSpPr>
         <p:spPr/>
@@ -8577,19 +8648,19 @@
           <a:lstStyle/>
           <a:p>
             <a:r>
-              <a:t>6.1 작은 시간표와 불변식</a:t>
-            </a:r>
-          </a:p>
-        </p:txBody>
-      </p:sp>
-      <p:sp>
-        <p:nvSpPr>
-          <p:cNvPr id="3" name="Text Placeholder 2"/>
-          <p:cNvSpPr>
-            <a:spLocks noGrp="1"/>
-          </p:cNvSpPr>
-          <p:nvPr>
-            <p:ph type="body" idx="101"/>
+              <a:t>06</a:t>
+            </a:r>
+          </a:p>
+        </p:txBody>
+      </p:sp>
+      <p:sp>
+        <p:nvSpPr>
+          <p:cNvPr id="3" name="Title 2"/>
+          <p:cNvSpPr>
+            <a:spLocks noGrp="1"/>
+          </p:cNvSpPr>
+          <p:nvPr>
+            <p:ph type="title" idx="101"/>
           </p:nvPr>
         </p:nvSpPr>
         <p:spPr/>
@@ -8598,7 +8669,7 @@
           <a:lstStyle/>
           <a:p>
             <a:r>
-              <a:t>6. 교재 6.7 검증과 정리</a:t>
+              <a:t>교재 6.7 검증과 정리</a:t>
             </a:r>
           </a:p>
         </p:txBody>
@@ -8618,82 +8689,58 @@
           <a:bodyPr/>
           <a:lstStyle/>
           <a:p>
-            <a:pPr/>
-            <a:r>
-              <a:t>실제 GTFS로는 정답을 손으로 확인 불가 — 답을 아는 소형 시간표 사용</a:t>
-            </a:r>
-          </a:p>
-          <a:p>
-            <a:pPr lvl="1"/>
-            <a:r>
-              <a:t>직통 도착, 환승 1회 도착, 출발 5분 지연 시 다음 차 탑승</a:t>
-            </a:r>
-          </a:p>
-          <a:p>
-            <a:pPr/>
-            <a:r>
-              <a:t>실제 피드에서는 불변식 확인</a:t>
-            </a:r>
-          </a:p>
-          <a:p>
-            <a:pPr lvl="1"/>
-            <a:r>
-              <a:t>30분 늦게 출발했는데 더 일찍 도착한 정류장이 0개</a:t>
-            </a:r>
-          </a:p>
-          <a:p>
-            <a:pPr lvl="1"/>
-            <a:r>
-              <a:t>새벽 3시 출발 시 도보로 닿는 정류장만 도달</a:t>
-            </a:r>
-          </a:p>
-        </p:txBody>
-      </p:sp>
-      <p:sp>
-        <p:nvSpPr>
-          <p:cNvPr id="25" name="Slide Number Placeholder 0"/>
-          <p:cNvSpPr>
-            <a:spLocks noGrp="1"/>
-          </p:cNvSpPr>
-          <p:nvPr>
-            <p:ph type="sldNum" sz="quarter" idx="4294967295"/>
-          </p:nvPr>
-        </p:nvSpPr>
-        <p:spPr>
-          <a:xfrm>
-            <a:off x="10591495" y="6355080"/>
-            <a:ext cx="914400" cy="274320"/>
-          </a:xfrm>
-          <a:prstGeom prst="rect">
-            <a:avLst/>
-          </a:prstGeom>
-          <a:extLst>
-            <a:ext uri="{C572A759-6A51-4108-AA02-DFA0A04FC94B}">
-              <ma14:wrappingTextBoxFlag xmlns:ma14="http://schemas.microsoft.com/office/mac/drawingml/2011/main" val="0"/>
-            </a:ext>
-          </a:extLst>
-        </p:spPr>
-        <p:txBody>
-          <a:bodyPr/>
-          <a:lstStyle>
-            <a:lvl1pPr>
-              <a:defRPr sz="1000">
+            <a:pPr>
+              <a:spcAft>
+                <a:spcPts val="1000"/>
+              </a:spcAft>
+            </a:pPr>
+            <a:r>
+              <a:rPr>
                 <a:solidFill>
                   <a:srgbClr val="AFAFAF"/>
                 </a:solidFill>
-                <a:latin typeface="Pretendard Medium"/>
-                <a:ea typeface="Pretendard Medium"/>
-                <a:cs typeface="Pretendard Medium"/>
-              </a:defRPr>
-            </a:lvl1pPr>
-          </a:lstStyle>
-          <a:p>
-            <a:pPr algn="r"/>
-            <a:fld id="{F7021451-1387-4CA6-816F-3879F97B5CBC}" type="slidenum">
-              <a:rPr b="0" lang="en-US"/>
-              <a:t>1004</a:t>
-            </a:fld>
-            <a:endParaRPr lang="en-US"/>
+              </a:rPr>
+              <a:t>6.1  </a:t>
+            </a:r>
+            <a:r>
+              <a:t>작은 시간표와 불변식</a:t>
+            </a:r>
+          </a:p>
+          <a:p>
+            <a:pPr>
+              <a:spcAft>
+                <a:spcPts val="1000"/>
+              </a:spcAft>
+            </a:pPr>
+            <a:r>
+              <a:rPr>
+                <a:solidFill>
+                  <a:srgbClr val="AFAFAF"/>
+                </a:solidFill>
+              </a:rPr>
+              <a:t>6.2  </a:t>
+            </a:r>
+            <a:r>
+              <a:t>오늘의 정리</a:t>
+            </a:r>
+          </a:p>
+          <a:p>
+            <a:pPr>
+              <a:spcAft>
+                <a:spcPts val="1000"/>
+              </a:spcAft>
+            </a:pPr>
+            <a:r>
+              <a:rPr>
+                <a:solidFill>
+                  <a:srgbClr val="AFAFAF"/>
+                </a:solidFill>
+              </a:rPr>
+              <a:t>6.3  </a:t>
+            </a:r>
+            <a:r>
+              <a:t>연습과 다음 장</a:t>
+            </a:r>
           </a:p>
         </p:txBody>
       </p:sp>
@@ -8731,7 +8778,7 @@
           <a:lstStyle/>
           <a:p>
             <a:r>
-              <a:t>6.2 오늘의 정리</a:t>
+              <a:t>6.1 작은 시간표와 불변식</a:t>
             </a:r>
           </a:p>
         </p:txBody>
@@ -8774,25 +8821,31 @@
           <a:p>
             <a:pPr/>
             <a:r>
-              <a:t>대중교통은 도착 시각에 따라 비용이 변동 — 그래프 최단경로 사용 불가</a:t>
+              <a:t>실제 GTFS로는 정답을 손으로 확인 불가 — 답을 아는 소형 시간표 사용</a:t>
+            </a:r>
+          </a:p>
+          <a:p>
+            <a:pPr lvl="1"/>
+            <a:r>
+              <a:t>직통 도착, 환승 1회 도착, 출발 5분 지연 시 다음 차 탑승</a:t>
             </a:r>
           </a:p>
           <a:p>
             <a:pPr/>
             <a:r>
-              <a:t>RAPTOR는 환승 횟수를 라운드로 사용, 우선순위 큐와 정렬이 없음</a:t>
-            </a:r>
-          </a:p>
-          <a:p>
-            <a:pPr/>
-            <a:r>
-              <a:t>운행 8,923개를 패턴 349개로 통합해 정류장 순서를 확정</a:t>
-            </a:r>
-          </a:p>
-          <a:p>
-            <a:pPr/>
-            <a:r>
-              <a:t>1회 실행에 80 ms, 정류장 4,156개의 도착 시각 산출</a:t>
+              <a:t>실제 피드에서는 불변식 확인</a:t>
+            </a:r>
+          </a:p>
+          <a:p>
+            <a:pPr lvl="1"/>
+            <a:r>
+              <a:t>30분 늦게 출발했는데 더 일찍 도착한 정류장이 0개</a:t>
+            </a:r>
+          </a:p>
+          <a:p>
+            <a:pPr lvl="1"/>
+            <a:r>
+              <a:t>새벽 3시 출발 시 도보로 닿는 정류장만 도달</a:t>
             </a:r>
           </a:p>
         </p:txBody>
@@ -8879,7 +8932,7 @@
           <a:lstStyle/>
           <a:p>
             <a:r>
-              <a:t>6.3 연습과 다음 장</a:t>
+              <a:t>6.2 오늘의 정리</a:t>
             </a:r>
           </a:p>
         </p:txBody>
@@ -8922,37 +8975,25 @@
           <a:p>
             <a:pPr/>
             <a:r>
-              <a:t>연습 6.1 ★ — 출발 시각을 07시부터 23시까지 1시간 간격으로 변경</a:t>
-            </a:r>
-          </a:p>
-          <a:p>
-            <a:pPr lvl="1"/>
-            <a:r>
-              <a:t>산출물: 꺾은선 그래프 1장, 최장 시각과 추정 원인 2~3줄</a:t>
+              <a:t>대중교통은 도착 시각에 따라 비용이 변동 — 그래프 최단경로 사용 불가</a:t>
             </a:r>
           </a:p>
           <a:p>
             <a:pPr/>
             <a:r>
-              <a:t>연습 6.2 ★★ — 최대 라운드를 1에서 5까지 변경했을 때 도달 정류장 수</a:t>
-            </a:r>
-          </a:p>
-          <a:p>
-            <a:pPr lvl="1"/>
-            <a:r>
-              <a:t>산출물: 라운드별 도달 정류장 표, 포화 지점 한 문장</a:t>
+              <a:t>RAPTOR는 환승 횟수를 라운드로 사용, 우선순위 큐와 정렬이 없음</a:t>
             </a:r>
           </a:p>
           <a:p>
             <a:pPr/>
             <a:r>
-              <a:t>연습 6.3 ★★★ — 등시선 지도 2장과 출발지별 비교</a:t>
+              <a:t>운행 8,923개를 패턴 349개로 통합해 정류장 순서를 확정</a:t>
             </a:r>
           </a:p>
           <a:p>
             <a:pPr/>
             <a:r>
-              <a:t>다음 장: 7장 환승 규칙 정교화와 요금 계산</a:t>
+              <a:t>1회 실행에 80 ms, 정류장 4,156개의 도착 시각 산출</a:t>
             </a:r>
           </a:p>
         </p:txBody>
@@ -9039,6 +9080,166 @@
           <a:lstStyle/>
           <a:p>
             <a:r>
+              <a:t>6.3 연습과 다음 장</a:t>
+            </a:r>
+          </a:p>
+        </p:txBody>
+      </p:sp>
+      <p:sp>
+        <p:nvSpPr>
+          <p:cNvPr id="3" name="Text Placeholder 2"/>
+          <p:cNvSpPr>
+            <a:spLocks noGrp="1"/>
+          </p:cNvSpPr>
+          <p:nvPr>
+            <p:ph type="body" idx="101"/>
+          </p:nvPr>
+        </p:nvSpPr>
+        <p:spPr/>
+        <p:txBody>
+          <a:bodyPr/>
+          <a:lstStyle/>
+          <a:p>
+            <a:r>
+              <a:t>6. 교재 6.7 검증과 정리</a:t>
+            </a:r>
+          </a:p>
+        </p:txBody>
+      </p:sp>
+      <p:sp>
+        <p:nvSpPr>
+          <p:cNvPr id="4" name="Text Placeholder 3"/>
+          <p:cNvSpPr>
+            <a:spLocks noGrp="1"/>
+          </p:cNvSpPr>
+          <p:nvPr>
+            <p:ph type="body" idx="102"/>
+          </p:nvPr>
+        </p:nvSpPr>
+        <p:spPr/>
+        <p:txBody>
+          <a:bodyPr/>
+          <a:lstStyle/>
+          <a:p>
+            <a:pPr/>
+            <a:r>
+              <a:t>연습 6.1 ★ — 출발 시각을 07시부터 23시까지 1시간 간격으로 변경</a:t>
+            </a:r>
+          </a:p>
+          <a:p>
+            <a:pPr lvl="1"/>
+            <a:r>
+              <a:t>산출물: 꺾은선 그래프 1장, 최장 시각과 추정 원인 2~3줄</a:t>
+            </a:r>
+          </a:p>
+          <a:p>
+            <a:pPr/>
+            <a:r>
+              <a:t>연습 6.2 ★★ — 최대 라운드를 1에서 5까지 변경했을 때 도달 정류장 수</a:t>
+            </a:r>
+          </a:p>
+          <a:p>
+            <a:pPr lvl="1"/>
+            <a:r>
+              <a:t>산출물: 라운드별 도달 정류장 표, 포화 지점 한 문장</a:t>
+            </a:r>
+          </a:p>
+          <a:p>
+            <a:pPr/>
+            <a:r>
+              <a:t>연습 6.3 ★★★ — 등시선 지도 2장과 출발지별 비교</a:t>
+            </a:r>
+          </a:p>
+          <a:p>
+            <a:pPr/>
+            <a:r>
+              <a:t>다음 장: 7장 환승 규칙 정교화와 요금 계산</a:t>
+            </a:r>
+          </a:p>
+        </p:txBody>
+      </p:sp>
+      <p:sp>
+        <p:nvSpPr>
+          <p:cNvPr id="25" name="Slide Number Placeholder 0"/>
+          <p:cNvSpPr>
+            <a:spLocks noGrp="1"/>
+          </p:cNvSpPr>
+          <p:nvPr>
+            <p:ph type="sldNum" sz="quarter" idx="4294967295"/>
+          </p:nvPr>
+        </p:nvSpPr>
+        <p:spPr>
+          <a:xfrm>
+            <a:off x="10591495" y="6355080"/>
+            <a:ext cx="914400" cy="274320"/>
+          </a:xfrm>
+          <a:prstGeom prst="rect">
+            <a:avLst/>
+          </a:prstGeom>
+          <a:extLst>
+            <a:ext uri="{C572A759-6A51-4108-AA02-DFA0A04FC94B}">
+              <ma14:wrappingTextBoxFlag xmlns:ma14="http://schemas.microsoft.com/office/mac/drawingml/2011/main" val="0"/>
+            </a:ext>
+          </a:extLst>
+        </p:spPr>
+        <p:txBody>
+          <a:bodyPr/>
+          <a:lstStyle>
+            <a:lvl1pPr>
+              <a:defRPr sz="1000">
+                <a:solidFill>
+                  <a:srgbClr val="AFAFAF"/>
+                </a:solidFill>
+                <a:latin typeface="Pretendard Medium"/>
+                <a:ea typeface="Pretendard Medium"/>
+                <a:cs typeface="Pretendard Medium"/>
+              </a:defRPr>
+            </a:lvl1pPr>
+          </a:lstStyle>
+          <a:p>
+            <a:pPr algn="r"/>
+            <a:fld id="{F7021451-1387-4CA6-816F-3879F97B5CBC}" type="slidenum">
+              <a:rPr b="0" lang="en-US"/>
+              <a:t>1004</a:t>
+            </a:fld>
+            <a:endParaRPr lang="en-US"/>
+          </a:p>
+        </p:txBody>
+      </p:sp>
+    </p:spTree>
+  </p:cSld>
+  <p:clrMapOvr>
+    <a:masterClrMapping/>
+  </p:clrMapOvr>
+</p:sld>
+</file>
+
+<file path=ppt/slides/slide24.xml><?xml version="1.0" encoding="utf-8"?>
+<p:sld xmlns:a="http://schemas.openxmlformats.org/drawingml/2006/main" xmlns:p="http://schemas.openxmlformats.org/presentationml/2006/main" xmlns:r="http://schemas.openxmlformats.org/officeDocument/2006/relationships">
+  <p:cSld>
+    <p:spTree>
+      <p:nvGrpSpPr>
+        <p:cNvPr id="1" name=""/>
+        <p:cNvGrpSpPr/>
+        <p:nvPr/>
+      </p:nvGrpSpPr>
+      <p:grpSpPr/>
+      <p:sp>
+        <p:nvSpPr>
+          <p:cNvPr id="2" name="Title 1"/>
+          <p:cNvSpPr>
+            <a:spLocks noGrp="1"/>
+          </p:cNvSpPr>
+          <p:nvPr>
+            <p:ph type="title" idx="100"/>
+          </p:nvPr>
+        </p:nvSpPr>
+        <p:spPr/>
+        <p:txBody>
+          <a:bodyPr/>
+          <a:lstStyle/>
+          <a:p>
+            <a:r>
               <a:t>다음 주에 봅니다</a:t>
             </a:r>
           </a:p>
@@ -9196,6 +9397,24 @@
               <a:t>학습 목표</a:t>
             </a:r>
           </a:p>
+          <a:p>
+            <a:pPr>
+              <a:spcAft>
+                <a:spcPts val="1000"/>
+              </a:spcAft>
+            </a:pPr>
+            <a:r>
+              <a:rPr>
+                <a:solidFill>
+                  <a:srgbClr val="AFAFAF"/>
+                </a:solidFill>
+              </a:rPr>
+              <a:t>1.3  </a:t>
+            </a:r>
+            <a:r>
+              <a:t>교재와 실습을 여는 곳</a:t>
+            </a:r>
+          </a:p>
         </p:txBody>
       </p:sp>
     </p:spTree>
@@ -9526,12 +9745,12 @@
       <p:grpSpPr/>
       <p:sp>
         <p:nvSpPr>
-          <p:cNvPr id="2" name="Text Placeholder 1"/>
-          <p:cNvSpPr>
-            <a:spLocks noGrp="1"/>
-          </p:cNvSpPr>
-          <p:nvPr>
-            <p:ph type="body" idx="100"/>
+          <p:cNvPr id="2" name="Title 1"/>
+          <p:cNvSpPr>
+            <a:spLocks noGrp="1"/>
+          </p:cNvSpPr>
+          <p:nvPr>
+            <p:ph type="title" idx="100"/>
           </p:nvPr>
         </p:nvSpPr>
         <p:spPr/>
@@ -9540,19 +9759,19 @@
           <a:lstStyle/>
           <a:p>
             <a:r>
-              <a:t>02</a:t>
-            </a:r>
-          </a:p>
-        </p:txBody>
-      </p:sp>
-      <p:sp>
-        <p:nvSpPr>
-          <p:cNvPr id="3" name="Title 2"/>
-          <p:cNvSpPr>
-            <a:spLocks noGrp="1"/>
-          </p:cNvSpPr>
-          <p:nvPr>
-            <p:ph type="title" idx="101"/>
+              <a:t>1.3 교재와 실습을 여는 곳</a:t>
+            </a:r>
+          </a:p>
+        </p:txBody>
+      </p:sp>
+      <p:sp>
+        <p:nvSpPr>
+          <p:cNvPr id="3" name="Text Placeholder 2"/>
+          <p:cNvSpPr>
+            <a:spLocks noGrp="1"/>
+          </p:cNvSpPr>
+          <p:nvPr>
+            <p:ph type="body" idx="101"/>
           </p:nvPr>
         </p:nvSpPr>
         <p:spPr/>
@@ -9561,7 +9780,7 @@
           <a:lstStyle/>
           <a:p>
             <a:r>
-              <a:t>교재 6.1 라운드 기반 탐색</a:t>
+              <a:t>1. 도입과 학습 목표</a:t>
             </a:r>
           </a:p>
         </p:txBody>
@@ -9581,40 +9800,415 @@
           <a:bodyPr/>
           <a:lstStyle/>
           <a:p>
-            <a:pPr>
-              <a:spcAft>
-                <a:spcPts val="1000"/>
-              </a:spcAft>
-            </a:pPr>
-            <a:r>
-              <a:rPr>
+            <a:pPr/>
+            <a:r>
+              <a:t>저장소: github.com/jihoyeo/mobility-simulation-book — blob/main 아래 경로</a:t>
+            </a:r>
+          </a:p>
+          <a:p>
+            <a:pPr/>
+            <a:r>
+              <a:t>노트북 실행: jupyter lab labs/ch06_raptor.ipynb</a:t>
+            </a:r>
+          </a:p>
+          <a:p>
+            <a:pPr/>
+            <a:r>
+              <a:t>진행 순서: 슬라이드 개요 → 교재 본문 → 실습 노트북</a:t>
+            </a:r>
+          </a:p>
+          <a:p>
+            <a:pPr/>
+            <a:r>
+              <a:t>자가 채점: python labs/check.py ch06</a:t>
+            </a:r>
+          </a:p>
+        </p:txBody>
+      </p:sp>
+      <p:sp>
+        <p:nvSpPr>
+          <p:cNvPr id="5" name="Text Placeholder 4"/>
+          <p:cNvSpPr>
+            <a:spLocks noGrp="1"/>
+          </p:cNvSpPr>
+          <p:nvPr>
+            <p:ph type="body" idx="103"/>
+          </p:nvPr>
+        </p:nvSpPr>
+        <p:spPr/>
+        <p:txBody>
+          <a:bodyPr/>
+          <a:lstStyle/>
+          <a:p>
+            <a:r>
+              <a:t>표 1. 오늘 여는 파일과 경로</a:t>
+            </a:r>
+          </a:p>
+        </p:txBody>
+      </p:sp>
+      <p:graphicFrame>
+        <p:nvGraphicFramePr>
+          <p:cNvPr id="6" name="Table Placeholder 5"/>
+          <p:cNvGraphicFramePr>
+            <a:graphicFrameLocks noGrp="1"/>
+          </p:cNvGraphicFramePr>
+          <p:nvPr>
+            <p:ph type="tbl" idx="104"/>
+          </p:nvPr>
+        </p:nvGraphicFramePr>
+        <p:xfrm>
+          <a:off x="4937760" y="1828800"/>
+          <a:ext cx="6565392" cy="2311400"/>
+        </p:xfrm>
+        <a:graphic>
+          <a:graphicData uri="http://schemas.openxmlformats.org/drawingml/2006/table">
+            <a:tbl>
+              <a:tblPr firstRow="0" bandRow="0" firstCol="0" lastRow="0" lastCol="0" bandCol="0"/>
+              <a:tblGrid>
+                <a:gridCol w="3282696"/>
+                <a:gridCol w="3282696"/>
+              </a:tblGrid>
+              <a:tr h="406400">
+                <a:tc>
+                  <a:txBody>
+                    <a:bodyPr/>
+                    <a:lstStyle/>
+                    <a:p>
+                      <a:r>
+                        <a:rPr sz="1300" b="0">
+                          <a:solidFill>
+                            <a:srgbClr val="FFFFFF"/>
+                          </a:solidFill>
+                          <a:latin typeface="Pretendard Medium"/>
+                        </a:rPr>
+                        <a:t>자료</a:t>
+                      </a:r>
+                    </a:p>
+                  </a:txBody>
+                  <a:tcPr marL="101600" marR="101600" marT="76200" marB="76200" anchor="ctr">
+                    <a:solidFill>
+                      <a:srgbClr val="000000"/>
+                    </a:solidFill>
+                    <a:lnL w="0">
+                      <a:noFill/>
+                    </a:lnL>
+                    <a:lnR w="0">
+                      <a:noFill/>
+                    </a:lnR>
+                    <a:lnT w="0">
+                      <a:noFill/>
+                    </a:lnT>
+                    <a:lnB w="0">
+                      <a:noFill/>
+                    </a:lnB>
+                  </a:tcPr>
+                </a:tc>
+                <a:tc>
+                  <a:txBody>
+                    <a:bodyPr/>
+                    <a:lstStyle/>
+                    <a:p>
+                      <a:r>
+                        <a:rPr sz="1300" b="0">
+                          <a:solidFill>
+                            <a:srgbClr val="FFFFFF"/>
+                          </a:solidFill>
+                          <a:latin typeface="Pretendard Medium"/>
+                        </a:rPr>
+                        <a:t>경로</a:t>
+                      </a:r>
+                    </a:p>
+                  </a:txBody>
+                  <a:tcPr marL="101600" marR="101600" marT="76200" marB="76200" anchor="ctr">
+                    <a:solidFill>
+                      <a:srgbClr val="000000"/>
+                    </a:solidFill>
+                    <a:lnL w="0">
+                      <a:noFill/>
+                    </a:lnL>
+                    <a:lnR w="0">
+                      <a:noFill/>
+                    </a:lnR>
+                    <a:lnT w="0">
+                      <a:noFill/>
+                    </a:lnT>
+                    <a:lnB w="0">
+                      <a:noFill/>
+                    </a:lnB>
+                  </a:tcPr>
+                </a:tc>
+              </a:tr>
+              <a:tr h="635000">
+                <a:tc>
+                  <a:txBody>
+                    <a:bodyPr/>
+                    <a:lstStyle/>
+                    <a:p>
+                      <a:r>
+                        <a:rPr sz="1300" b="1">
+                          <a:solidFill>
+                            <a:srgbClr val="000000"/>
+                          </a:solidFill>
+                          <a:latin typeface="Pretendard"/>
+                        </a:rPr>
+                        <a:t>교재 원고</a:t>
+                      </a:r>
+                    </a:p>
+                  </a:txBody>
+                  <a:tcPr marL="101600" marR="101600" marT="101600" marB="101600" anchor="ctr">
+                    <a:solidFill>
+                      <a:srgbClr val="FFFFFF"/>
+                    </a:solidFill>
+                    <a:lnL w="0">
+                      <a:noFill/>
+                    </a:lnL>
+                    <a:lnR w="0">
+                      <a:noFill/>
+                    </a:lnR>
+                    <a:lnT w="0">
+                      <a:noFill/>
+                    </a:lnT>
+                    <a:lnB w="9525">
+                      <a:solidFill>
+                        <a:srgbClr val="E2E2E2"/>
+                      </a:solidFill>
+                    </a:lnB>
+                  </a:tcPr>
+                </a:tc>
+                <a:tc>
+                  <a:txBody>
+                    <a:bodyPr/>
+                    <a:lstStyle/>
+                    <a:p>
+                      <a:r>
+                        <a:rPr sz="1300" b="0">
+                          <a:solidFill>
+                            <a:srgbClr val="5E5E5E"/>
+                          </a:solidFill>
+                          <a:latin typeface="Pretendard Medium"/>
+                        </a:rPr>
+                        <a:t>ko/ch06_raptor.md</a:t>
+                      </a:r>
+                    </a:p>
+                  </a:txBody>
+                  <a:tcPr marL="101600" marR="101600" marT="101600" marB="101600" anchor="ctr">
+                    <a:solidFill>
+                      <a:srgbClr val="FFFFFF"/>
+                    </a:solidFill>
+                    <a:lnL w="0">
+                      <a:noFill/>
+                    </a:lnL>
+                    <a:lnR w="0">
+                      <a:noFill/>
+                    </a:lnR>
+                    <a:lnT w="0">
+                      <a:noFill/>
+                    </a:lnT>
+                    <a:lnB w="9525">
+                      <a:solidFill>
+                        <a:srgbClr val="E2E2E2"/>
+                      </a:solidFill>
+                    </a:lnB>
+                  </a:tcPr>
+                </a:tc>
+              </a:tr>
+              <a:tr h="635000">
+                <a:tc>
+                  <a:txBody>
+                    <a:bodyPr/>
+                    <a:lstStyle/>
+                    <a:p>
+                      <a:r>
+                        <a:rPr sz="1300" b="1">
+                          <a:solidFill>
+                            <a:srgbClr val="000000"/>
+                          </a:solidFill>
+                          <a:latin typeface="Pretendard"/>
+                        </a:rPr>
+                        <a:t>실습 노트북</a:t>
+                      </a:r>
+                    </a:p>
+                  </a:txBody>
+                  <a:tcPr marL="101600" marR="101600" marT="101600" marB="101600" anchor="ctr">
+                    <a:solidFill>
+                      <a:srgbClr val="FFFFFF"/>
+                    </a:solidFill>
+                    <a:lnL w="0">
+                      <a:noFill/>
+                    </a:lnL>
+                    <a:lnR w="0">
+                      <a:noFill/>
+                    </a:lnR>
+                    <a:lnT w="0">
+                      <a:noFill/>
+                    </a:lnT>
+                    <a:lnB w="9525">
+                      <a:solidFill>
+                        <a:srgbClr val="E2E2E2"/>
+                      </a:solidFill>
+                    </a:lnB>
+                  </a:tcPr>
+                </a:tc>
+                <a:tc>
+                  <a:txBody>
+                    <a:bodyPr/>
+                    <a:lstStyle/>
+                    <a:p>
+                      <a:r>
+                        <a:rPr sz="1300" b="0">
+                          <a:solidFill>
+                            <a:srgbClr val="5E5E5E"/>
+                          </a:solidFill>
+                          <a:latin typeface="Pretendard Medium"/>
+                        </a:rPr>
+                        <a:t>labs/ch06_raptor.ipynb</a:t>
+                      </a:r>
+                    </a:p>
+                  </a:txBody>
+                  <a:tcPr marL="101600" marR="101600" marT="101600" marB="101600" anchor="ctr">
+                    <a:solidFill>
+                      <a:srgbClr val="FFFFFF"/>
+                    </a:solidFill>
+                    <a:lnL w="0">
+                      <a:noFill/>
+                    </a:lnL>
+                    <a:lnR w="0">
+                      <a:noFill/>
+                    </a:lnR>
+                    <a:lnT w="0">
+                      <a:noFill/>
+                    </a:lnT>
+                    <a:lnB w="9525">
+                      <a:solidFill>
+                        <a:srgbClr val="E2E2E2"/>
+                      </a:solidFill>
+                    </a:lnB>
+                  </a:tcPr>
+                </a:tc>
+              </a:tr>
+              <a:tr h="635000">
+                <a:tc>
+                  <a:txBody>
+                    <a:bodyPr/>
+                    <a:lstStyle/>
+                    <a:p>
+                      <a:r>
+                        <a:rPr sz="1300" b="1">
+                          <a:solidFill>
+                            <a:srgbClr val="000000"/>
+                          </a:solidFill>
+                          <a:latin typeface="Pretendard"/>
+                        </a:rPr>
+                        <a:t>채점 파일</a:t>
+                      </a:r>
+                    </a:p>
+                  </a:txBody>
+                  <a:tcPr marL="101600" marR="101600" marT="101600" marB="101600" anchor="ctr">
+                    <a:solidFill>
+                      <a:srgbClr val="FFFFFF"/>
+                    </a:solidFill>
+                    <a:lnL w="0">
+                      <a:noFill/>
+                    </a:lnL>
+                    <a:lnR w="0">
+                      <a:noFill/>
+                    </a:lnR>
+                    <a:lnT w="0">
+                      <a:noFill/>
+                    </a:lnT>
+                    <a:lnB w="9525">
+                      <a:solidFill>
+                        <a:srgbClr val="E2E2E2"/>
+                      </a:solidFill>
+                    </a:lnB>
+                  </a:tcPr>
+                </a:tc>
+                <a:tc>
+                  <a:txBody>
+                    <a:bodyPr/>
+                    <a:lstStyle/>
+                    <a:p>
+                      <a:r>
+                        <a:rPr sz="1300" b="0">
+                          <a:solidFill>
+                            <a:srgbClr val="5E5E5E"/>
+                          </a:solidFill>
+                          <a:latin typeface="Pretendard Medium"/>
+                        </a:rPr>
+                        <a:t>labs/ch06_raptor.py</a:t>
+                      </a:r>
+                    </a:p>
+                  </a:txBody>
+                  <a:tcPr marL="101600" marR="101600" marT="101600" marB="101600" anchor="ctr">
+                    <a:solidFill>
+                      <a:srgbClr val="FFFFFF"/>
+                    </a:solidFill>
+                    <a:lnL w="0">
+                      <a:noFill/>
+                    </a:lnL>
+                    <a:lnR w="0">
+                      <a:noFill/>
+                    </a:lnR>
+                    <a:lnT w="0">
+                      <a:noFill/>
+                    </a:lnT>
+                    <a:lnB w="9525">
+                      <a:solidFill>
+                        <a:srgbClr val="E2E2E2"/>
+                      </a:solidFill>
+                    </a:lnB>
+                  </a:tcPr>
+                </a:tc>
+              </a:tr>
+            </a:tbl>
+          </a:graphicData>
+        </a:graphic>
+      </p:graphicFrame>
+      <p:sp>
+        <p:nvSpPr>
+          <p:cNvPr id="25" name="Slide Number Placeholder 0"/>
+          <p:cNvSpPr>
+            <a:spLocks noGrp="1"/>
+          </p:cNvSpPr>
+          <p:nvPr>
+            <p:ph type="sldNum" sz="quarter" idx="4294967295"/>
+          </p:nvPr>
+        </p:nvSpPr>
+        <p:spPr>
+          <a:xfrm>
+            <a:off x="10591495" y="6355080"/>
+            <a:ext cx="914400" cy="274320"/>
+          </a:xfrm>
+          <a:prstGeom prst="rect">
+            <a:avLst/>
+          </a:prstGeom>
+          <a:extLst>
+            <a:ext uri="{C572A759-6A51-4108-AA02-DFA0A04FC94B}">
+              <ma14:wrappingTextBoxFlag xmlns:ma14="http://schemas.microsoft.com/office/mac/drawingml/2011/main" val="0"/>
+            </a:ext>
+          </a:extLst>
+        </p:spPr>
+        <p:txBody>
+          <a:bodyPr/>
+          <a:lstStyle>
+            <a:lvl1pPr>
+              <a:defRPr sz="1000">
                 <a:solidFill>
                   <a:srgbClr val="AFAFAF"/>
                 </a:solidFill>
-              </a:rPr>
-              <a:t>2.1  </a:t>
-            </a:r>
-            <a:r>
-              <a:t>시각-정류장 그래프의 한계</a:t>
-            </a:r>
-          </a:p>
-          <a:p>
-            <a:pPr>
-              <a:spcAft>
-                <a:spcPts val="1000"/>
-              </a:spcAft>
-            </a:pPr>
-            <a:r>
-              <a:rPr>
-                <a:solidFill>
-                  <a:srgbClr val="AFAFAF"/>
-                </a:solidFill>
-              </a:rPr>
-              <a:t>2.2  </a:t>
-            </a:r>
-            <a:r>
-              <a:t>라운드의 정의</a:t>
-            </a:r>
+                <a:latin typeface="Pretendard Medium"/>
+                <a:ea typeface="Pretendard Medium"/>
+                <a:cs typeface="Pretendard Medium"/>
+              </a:defRPr>
+            </a:lvl1pPr>
+          </a:lstStyle>
+          <a:p>
+            <a:pPr algn="r"/>
+            <a:fld id="{F7021451-1387-4CA6-816F-3879F97B5CBC}" type="slidenum">
+              <a:rPr b="0" lang="en-US"/>
+              <a:t>1008</a:t>
+            </a:fld>
+            <a:endParaRPr lang="en-US"/>
           </a:p>
         </p:txBody>
       </p:sp>
@@ -9638,12 +10232,12 @@
       <p:grpSpPr/>
       <p:sp>
         <p:nvSpPr>
-          <p:cNvPr id="2" name="Title 1"/>
-          <p:cNvSpPr>
-            <a:spLocks noGrp="1"/>
-          </p:cNvSpPr>
-          <p:nvPr>
-            <p:ph type="title" idx="100"/>
+          <p:cNvPr id="2" name="Text Placeholder 1"/>
+          <p:cNvSpPr>
+            <a:spLocks noGrp="1"/>
+          </p:cNvSpPr>
+          <p:nvPr>
+            <p:ph type="body" idx="100"/>
           </p:nvPr>
         </p:nvSpPr>
         <p:spPr/>
@@ -9652,19 +10246,19 @@
           <a:lstStyle/>
           <a:p>
             <a:r>
-              <a:t>2.1 시각-정류장 그래프의 한계</a:t>
-            </a:r>
-          </a:p>
-        </p:txBody>
-      </p:sp>
-      <p:sp>
-        <p:nvSpPr>
-          <p:cNvPr id="3" name="Text Placeholder 2"/>
-          <p:cNvSpPr>
-            <a:spLocks noGrp="1"/>
-          </p:cNvSpPr>
-          <p:nvPr>
-            <p:ph type="body" idx="101"/>
+              <a:t>02</a:t>
+            </a:r>
+          </a:p>
+        </p:txBody>
+      </p:sp>
+      <p:sp>
+        <p:nvSpPr>
+          <p:cNvPr id="3" name="Title 2"/>
+          <p:cNvSpPr>
+            <a:spLocks noGrp="1"/>
+          </p:cNvSpPr>
+          <p:nvPr>
+            <p:ph type="title" idx="101"/>
           </p:nvPr>
         </p:nvSpPr>
         <p:spPr/>
@@ -9673,7 +10267,7 @@
           <a:lstStyle/>
           <a:p>
             <a:r>
-              <a:t>2. 교재 6.1 라운드 기반 탐색</a:t>
+              <a:t>교재 6.1 라운드 기반 탐색</a:t>
             </a:r>
           </a:p>
         </p:txBody>
@@ -9693,76 +10287,40 @@
           <a:bodyPr/>
           <a:lstStyle/>
           <a:p>
-            <a:pPr/>
-            <a:r>
-              <a:t>대안: 정류장과 시각의 쌍을 노드로 구성</a:t>
-            </a:r>
-          </a:p>
-          <a:p>
-            <a:pPr/>
-            <a:r>
-              <a:t>규모: 시각표 행 65만 개가 그대로 노드 수</a:t>
-            </a:r>
-          </a:p>
-          <a:p>
-            <a:pPr/>
-            <a:r>
-              <a:t>추가 문제: 출발 시각이 바뀔 때마다 재구성 필요</a:t>
-            </a:r>
-          </a:p>
-          <a:p>
-            <a:pPr/>
-            <a:r>
-              <a:t>RAPTOR의 관점: 환승 횟수를 라운드로 사용</a:t>
-            </a:r>
-          </a:p>
-        </p:txBody>
-      </p:sp>
-      <p:sp>
-        <p:nvSpPr>
-          <p:cNvPr id="25" name="Slide Number Placeholder 0"/>
-          <p:cNvSpPr>
-            <a:spLocks noGrp="1"/>
-          </p:cNvSpPr>
-          <p:nvPr>
-            <p:ph type="sldNum" sz="quarter" idx="4294967295"/>
-          </p:nvPr>
-        </p:nvSpPr>
-        <p:spPr>
-          <a:xfrm>
-            <a:off x="10591495" y="6355080"/>
-            <a:ext cx="914400" cy="274320"/>
-          </a:xfrm>
-          <a:prstGeom prst="rect">
-            <a:avLst/>
-          </a:prstGeom>
-          <a:extLst>
-            <a:ext uri="{C572A759-6A51-4108-AA02-DFA0A04FC94B}">
-              <ma14:wrappingTextBoxFlag xmlns:ma14="http://schemas.microsoft.com/office/mac/drawingml/2011/main" val="0"/>
-            </a:ext>
-          </a:extLst>
-        </p:spPr>
-        <p:txBody>
-          <a:bodyPr/>
-          <a:lstStyle>
-            <a:lvl1pPr>
-              <a:defRPr sz="1000">
+            <a:pPr>
+              <a:spcAft>
+                <a:spcPts val="1000"/>
+              </a:spcAft>
+            </a:pPr>
+            <a:r>
+              <a:rPr>
                 <a:solidFill>
                   <a:srgbClr val="AFAFAF"/>
                 </a:solidFill>
-                <a:latin typeface="Pretendard Medium"/>
-                <a:ea typeface="Pretendard Medium"/>
-                <a:cs typeface="Pretendard Medium"/>
-              </a:defRPr>
-            </a:lvl1pPr>
-          </a:lstStyle>
-          <a:p>
-            <a:pPr algn="r"/>
-            <a:fld id="{F7021451-1387-4CA6-816F-3879F97B5CBC}" type="slidenum">
-              <a:rPr b="0" lang="en-US"/>
-              <a:t>1004</a:t>
-            </a:fld>
-            <a:endParaRPr lang="en-US"/>
+              </a:rPr>
+              <a:t>2.1  </a:t>
+            </a:r>
+            <a:r>
+              <a:t>시각-정류장 그래프의 한계</a:t>
+            </a:r>
+          </a:p>
+          <a:p>
+            <a:pPr>
+              <a:spcAft>
+                <a:spcPts val="1000"/>
+              </a:spcAft>
+            </a:pPr>
+            <a:r>
+              <a:rPr>
+                <a:solidFill>
+                  <a:srgbClr val="AFAFAF"/>
+                </a:solidFill>
+              </a:rPr>
+              <a:t>2.2  </a:t>
+            </a:r>
+            <a:r>
+              <a:t>라운드의 정의</a:t>
+            </a:r>
           </a:p>
         </p:txBody>
       </p:sp>
@@ -9800,7 +10358,7 @@
           <a:lstStyle/>
           <a:p>
             <a:r>
-              <a:t>2.2 라운드의 정의</a:t>
+              <a:t>2.1 시각-정류장 그래프의 한계</a:t>
             </a:r>
           </a:p>
         </p:txBody>
@@ -9843,25 +10401,25 @@
           <a:p>
             <a:pPr/>
             <a:r>
-              <a:t>라운드 0: 도보로 도달 가능한 정류장</a:t>
+              <a:t>대안: 정류장과 시각의 쌍을 노드로 구성</a:t>
             </a:r>
           </a:p>
           <a:p>
             <a:pPr/>
             <a:r>
-              <a:t>라운드 1: 한 번 탑승해 도달 가능한 정류장</a:t>
+              <a:t>규모: 시각표 행 65만 개가 그대로 노드 수</a:t>
             </a:r>
           </a:p>
           <a:p>
             <a:pPr/>
             <a:r>
-              <a:t>라운드 k: k번 탑승해 도달 가능한 정류장</a:t>
+              <a:t>추가 문제: 출발 시각이 바뀔 때마다 재구성 필요</a:t>
             </a:r>
           </a:p>
           <a:p>
             <a:pPr/>
             <a:r>
-              <a:t>종료 조건: 환승은 대개 네다섯 번을 넘지 않음</a:t>
+              <a:t>RAPTOR의 관점: 환승 횟수를 라운드로 사용</a:t>
             </a:r>
           </a:p>
         </p:txBody>
@@ -9934,12 +10492,12 @@
       <p:grpSpPr/>
       <p:sp>
         <p:nvSpPr>
-          <p:cNvPr id="2" name="Text Placeholder 1"/>
-          <p:cNvSpPr>
-            <a:spLocks noGrp="1"/>
-          </p:cNvSpPr>
-          <p:nvPr>
-            <p:ph type="body" idx="100"/>
+          <p:cNvPr id="2" name="Title 1"/>
+          <p:cNvSpPr>
+            <a:spLocks noGrp="1"/>
+          </p:cNvSpPr>
+          <p:nvPr>
+            <p:ph type="title" idx="100"/>
           </p:nvPr>
         </p:nvSpPr>
         <p:spPr/>
@@ -9948,19 +10506,19 @@
           <a:lstStyle/>
           <a:p>
             <a:r>
-              <a:t>03</a:t>
-            </a:r>
-          </a:p>
-        </p:txBody>
-      </p:sp>
-      <p:sp>
-        <p:nvSpPr>
-          <p:cNvPr id="3" name="Title 2"/>
-          <p:cNvSpPr>
-            <a:spLocks noGrp="1"/>
-          </p:cNvSpPr>
-          <p:nvPr>
-            <p:ph type="title" idx="101"/>
+              <a:t>2.2 라운드의 정의</a:t>
+            </a:r>
+          </a:p>
+        </p:txBody>
+      </p:sp>
+      <p:sp>
+        <p:nvSpPr>
+          <p:cNvPr id="3" name="Text Placeholder 2"/>
+          <p:cNvSpPr>
+            <a:spLocks noGrp="1"/>
+          </p:cNvSpPr>
+          <p:nvPr>
+            <p:ph type="body" idx="101"/>
           </p:nvPr>
         </p:nvSpPr>
         <p:spPr/>
@@ -9969,7 +10527,7 @@
           <a:lstStyle/>
           <a:p>
             <a:r>
-              <a:t>교재 6.2–6.4 세 가지 준비</a:t>
+              <a:t>2. 교재 6.1 라운드 기반 탐색</a:t>
             </a:r>
           </a:p>
         </p:txBody>
@@ -9989,58 +10547,76 @@
           <a:bodyPr/>
           <a:lstStyle/>
           <a:p>
-            <a:pPr>
-              <a:spcAft>
-                <a:spcPts val="1000"/>
-              </a:spcAft>
-            </a:pPr>
-            <a:r>
-              <a:rPr>
+            <a:pPr/>
+            <a:r>
+              <a:t>라운드 0: 도보로 도달 가능한 정류장</a:t>
+            </a:r>
+          </a:p>
+          <a:p>
+            <a:pPr/>
+            <a:r>
+              <a:t>라운드 1: 한 번 탑승해 도달 가능한 정류장</a:t>
+            </a:r>
+          </a:p>
+          <a:p>
+            <a:pPr/>
+            <a:r>
+              <a:t>라운드 k: k번 탑승해 도달 가능한 정류장</a:t>
+            </a:r>
+          </a:p>
+          <a:p>
+            <a:pPr/>
+            <a:r>
+              <a:t>종료 조건: 환승은 대개 네다섯 번을 넘지 않음</a:t>
+            </a:r>
+          </a:p>
+        </p:txBody>
+      </p:sp>
+      <p:sp>
+        <p:nvSpPr>
+          <p:cNvPr id="25" name="Slide Number Placeholder 0"/>
+          <p:cNvSpPr>
+            <a:spLocks noGrp="1"/>
+          </p:cNvSpPr>
+          <p:nvPr>
+            <p:ph type="sldNum" sz="quarter" idx="4294967295"/>
+          </p:nvPr>
+        </p:nvSpPr>
+        <p:spPr>
+          <a:xfrm>
+            <a:off x="10591495" y="6355080"/>
+            <a:ext cx="914400" cy="274320"/>
+          </a:xfrm>
+          <a:prstGeom prst="rect">
+            <a:avLst/>
+          </a:prstGeom>
+          <a:extLst>
+            <a:ext uri="{C572A759-6A51-4108-AA02-DFA0A04FC94B}">
+              <ma14:wrappingTextBoxFlag xmlns:ma14="http://schemas.microsoft.com/office/mac/drawingml/2011/main" val="0"/>
+            </a:ext>
+          </a:extLst>
+        </p:spPr>
+        <p:txBody>
+          <a:bodyPr/>
+          <a:lstStyle>
+            <a:lvl1pPr>
+              <a:defRPr sz="1000">
                 <a:solidFill>
                   <a:srgbClr val="AFAFAF"/>
                 </a:solidFill>
-              </a:rPr>
-              <a:t>3.1  </a:t>
-            </a:r>
-            <a:r>
-              <a:t>노선이 아니라 패턴</a:t>
-            </a:r>
-          </a:p>
-          <a:p>
-            <a:pPr>
-              <a:spcAft>
-                <a:spcPts val="1000"/>
-              </a:spcAft>
-            </a:pPr>
-            <a:r>
-              <a:rPr>
-                <a:solidFill>
-                  <a:srgbClr val="AFAFAF"/>
-                </a:solidFill>
-              </a:rPr>
-              <a:t>3.2  </a:t>
-            </a:r>
-            <a:r>
-              <a:t>정류장에서 패턴으로의 역색인</a:t>
-            </a:r>
-          </a:p>
-          <a:p>
-            <a:pPr>
-              <a:spcAft>
-                <a:spcPts val="1000"/>
-              </a:spcAft>
-            </a:pPr>
-            <a:r>
-              <a:rPr>
-                <a:solidFill>
-                  <a:srgbClr val="AFAFAF"/>
-                </a:solidFill>
-              </a:rPr>
-              <a:t>3.3  </a:t>
-            </a:r>
-            <a:r>
-              <a:t>도보 환승 생성</a:t>
-            </a:r>
+                <a:latin typeface="Pretendard Medium"/>
+                <a:ea typeface="Pretendard Medium"/>
+                <a:cs typeface="Pretendard Medium"/>
+              </a:defRPr>
+            </a:lvl1pPr>
+          </a:lstStyle>
+          <a:p>
+            <a:pPr algn="r"/>
+            <a:fld id="{F7021451-1387-4CA6-816F-3879F97B5CBC}" type="slidenum">
+              <a:rPr b="0" lang="en-US"/>
+              <a:t>1004</a:t>
+            </a:fld>
+            <a:endParaRPr lang="en-US"/>
           </a:p>
         </p:txBody>
       </p:sp>
